--- a/docs/Epstein/Epstein_Murders.pptx
+++ b/docs/Epstein/Epstein_Murders.pptx
@@ -4,6 +4,9 @@
   <p:sldMasterIdLst>
     <p:sldMasterId id="2147483648" r:id="rId1"/>
   </p:sldMasterIdLst>
+  <p:notesMasterIdLst>
+    <p:notesMasterId r:id="rId48"/>
+  </p:notesMasterIdLst>
   <p:sldIdLst>
     <p:sldId id="274" r:id="rId2"/>
     <p:sldId id="323" r:id="rId3"/>
@@ -157,6 +160,3211 @@
 </p:presentation>
 </file>
 
+<file path=ppt/notesMasters/notesMaster1.xml><?xml version="1.0" encoding="utf-8"?>
+<p:notesMaster xmlns:a="http://schemas.openxmlformats.org/drawingml/2006/main" xmlns:r="http://schemas.openxmlformats.org/officeDocument/2006/relationships" xmlns:p="http://schemas.openxmlformats.org/presentationml/2006/main">
+  <p:cSld>
+    <p:bg>
+      <p:bgRef idx="1001">
+        <a:schemeClr val="bg1"/>
+      </p:bgRef>
+    </p:bg>
+    <p:spTree>
+      <p:nvGrpSpPr>
+        <p:cNvPr id="1" name=""/>
+        <p:cNvGrpSpPr/>
+        <p:nvPr/>
+      </p:nvGrpSpPr>
+      <p:grpSpPr>
+        <a:xfrm>
+          <a:off x="0" y="0"/>
+          <a:ext cx="0" cy="0"/>
+          <a:chOff x="0" y="0"/>
+          <a:chExt cx="0" cy="0"/>
+        </a:xfrm>
+      </p:grpSpPr>
+      <p:sp>
+        <p:nvSpPr>
+          <p:cNvPr id="2" name="Header Placeholder 1"/>
+          <p:cNvSpPr>
+            <a:spLocks noGrp="1"/>
+          </p:cNvSpPr>
+          <p:nvPr>
+            <p:ph type="hdr" sz="quarter"/>
+          </p:nvPr>
+        </p:nvSpPr>
+        <p:spPr>
+          <a:xfrm>
+            <a:off x="0" y="0"/>
+            <a:ext cx="2971800" cy="458788"/>
+          </a:xfrm>
+          <a:prstGeom prst="rect">
+            <a:avLst/>
+          </a:prstGeom>
+        </p:spPr>
+        <p:txBody>
+          <a:bodyPr vert="horz" lIns="91440" tIns="45720" rIns="91440" bIns="45720" rtlCol="0"/>
+          <a:lstStyle>
+            <a:lvl1pPr algn="l">
+              <a:defRPr sz="1200"/>
+            </a:lvl1pPr>
+          </a:lstStyle>
+          <a:p>
+            <a:endParaRPr lang="en-US"/>
+          </a:p>
+        </p:txBody>
+      </p:sp>
+      <p:sp>
+        <p:nvSpPr>
+          <p:cNvPr id="3" name="Date Placeholder 2"/>
+          <p:cNvSpPr>
+            <a:spLocks noGrp="1"/>
+          </p:cNvSpPr>
+          <p:nvPr>
+            <p:ph type="dt" idx="1"/>
+          </p:nvPr>
+        </p:nvSpPr>
+        <p:spPr>
+          <a:xfrm>
+            <a:off x="3884613" y="0"/>
+            <a:ext cx="2971800" cy="458788"/>
+          </a:xfrm>
+          <a:prstGeom prst="rect">
+            <a:avLst/>
+          </a:prstGeom>
+        </p:spPr>
+        <p:txBody>
+          <a:bodyPr vert="horz" lIns="91440" tIns="45720" rIns="91440" bIns="45720" rtlCol="0"/>
+          <a:lstStyle>
+            <a:lvl1pPr algn="r">
+              <a:defRPr sz="1200"/>
+            </a:lvl1pPr>
+          </a:lstStyle>
+          <a:p>
+            <a:fld id="{2A52D83E-74AB-3646-8A13-99BB64ACBD28}" type="datetimeFigureOut">
+              <a:rPr lang="en-US" smtClean="0"/>
+              <a:t>3/31/26</a:t>
+            </a:fld>
+            <a:endParaRPr lang="en-US"/>
+          </a:p>
+        </p:txBody>
+      </p:sp>
+      <p:sp>
+        <p:nvSpPr>
+          <p:cNvPr id="4" name="Slide Image Placeholder 3"/>
+          <p:cNvSpPr>
+            <a:spLocks noGrp="1" noRot="1" noChangeAspect="1"/>
+          </p:cNvSpPr>
+          <p:nvPr>
+            <p:ph type="sldImg" idx="2"/>
+          </p:nvPr>
+        </p:nvSpPr>
+        <p:spPr>
+          <a:xfrm>
+            <a:off x="685800" y="1143000"/>
+            <a:ext cx="5486400" cy="3086100"/>
+          </a:xfrm>
+          <a:prstGeom prst="rect">
+            <a:avLst/>
+          </a:prstGeom>
+          <a:noFill/>
+          <a:ln w="12700">
+            <a:solidFill>
+              <a:prstClr val="black"/>
+            </a:solidFill>
+          </a:ln>
+        </p:spPr>
+        <p:txBody>
+          <a:bodyPr vert="horz" lIns="91440" tIns="45720" rIns="91440" bIns="45720" rtlCol="0" anchor="ctr"/>
+          <a:lstStyle/>
+          <a:p>
+            <a:endParaRPr lang="en-US"/>
+          </a:p>
+        </p:txBody>
+      </p:sp>
+      <p:sp>
+        <p:nvSpPr>
+          <p:cNvPr id="5" name="Notes Placeholder 4"/>
+          <p:cNvSpPr>
+            <a:spLocks noGrp="1"/>
+          </p:cNvSpPr>
+          <p:nvPr>
+            <p:ph type="body" sz="quarter" idx="3"/>
+          </p:nvPr>
+        </p:nvSpPr>
+        <p:spPr>
+          <a:xfrm>
+            <a:off x="685800" y="4400550"/>
+            <a:ext cx="5486400" cy="3600450"/>
+          </a:xfrm>
+          <a:prstGeom prst="rect">
+            <a:avLst/>
+          </a:prstGeom>
+        </p:spPr>
+        <p:txBody>
+          <a:bodyPr vert="horz" lIns="91440" tIns="45720" rIns="91440" bIns="45720" rtlCol="0"/>
+          <a:lstStyle/>
+          <a:p>
+            <a:pPr lvl="0"/>
+            <a:r>
+              <a:rPr lang="en-US"/>
+              <a:t>Click to edit Master text styles</a:t>
+            </a:r>
+          </a:p>
+          <a:p>
+            <a:pPr lvl="1"/>
+            <a:r>
+              <a:rPr lang="en-US"/>
+              <a:t>Second level</a:t>
+            </a:r>
+          </a:p>
+          <a:p>
+            <a:pPr lvl="2"/>
+            <a:r>
+              <a:rPr lang="en-US"/>
+              <a:t>Third level</a:t>
+            </a:r>
+          </a:p>
+          <a:p>
+            <a:pPr lvl="3"/>
+            <a:r>
+              <a:rPr lang="en-US"/>
+              <a:t>Fourth level</a:t>
+            </a:r>
+          </a:p>
+          <a:p>
+            <a:pPr lvl="4"/>
+            <a:r>
+              <a:rPr lang="en-US"/>
+              <a:t>Fifth level</a:t>
+            </a:r>
+          </a:p>
+        </p:txBody>
+      </p:sp>
+      <p:sp>
+        <p:nvSpPr>
+          <p:cNvPr id="6" name="Footer Placeholder 5"/>
+          <p:cNvSpPr>
+            <a:spLocks noGrp="1"/>
+          </p:cNvSpPr>
+          <p:nvPr>
+            <p:ph type="ftr" sz="quarter" idx="4"/>
+          </p:nvPr>
+        </p:nvSpPr>
+        <p:spPr>
+          <a:xfrm>
+            <a:off x="0" y="8685213"/>
+            <a:ext cx="2971800" cy="458787"/>
+          </a:xfrm>
+          <a:prstGeom prst="rect">
+            <a:avLst/>
+          </a:prstGeom>
+        </p:spPr>
+        <p:txBody>
+          <a:bodyPr vert="horz" lIns="91440" tIns="45720" rIns="91440" bIns="45720" rtlCol="0" anchor="b"/>
+          <a:lstStyle>
+            <a:lvl1pPr algn="l">
+              <a:defRPr sz="1200"/>
+            </a:lvl1pPr>
+          </a:lstStyle>
+          <a:p>
+            <a:endParaRPr lang="en-US"/>
+          </a:p>
+        </p:txBody>
+      </p:sp>
+      <p:sp>
+        <p:nvSpPr>
+          <p:cNvPr id="7" name="Slide Number Placeholder 6"/>
+          <p:cNvSpPr>
+            <a:spLocks noGrp="1"/>
+          </p:cNvSpPr>
+          <p:nvPr>
+            <p:ph type="sldNum" sz="quarter" idx="5"/>
+          </p:nvPr>
+        </p:nvSpPr>
+        <p:spPr>
+          <a:xfrm>
+            <a:off x="3884613" y="8685213"/>
+            <a:ext cx="2971800" cy="458787"/>
+          </a:xfrm>
+          <a:prstGeom prst="rect">
+            <a:avLst/>
+          </a:prstGeom>
+        </p:spPr>
+        <p:txBody>
+          <a:bodyPr vert="horz" lIns="91440" tIns="45720" rIns="91440" bIns="45720" rtlCol="0" anchor="b"/>
+          <a:lstStyle>
+            <a:lvl1pPr algn="r">
+              <a:defRPr sz="1200"/>
+            </a:lvl1pPr>
+          </a:lstStyle>
+          <a:p>
+            <a:fld id="{A04941E9-2A29-D24C-9FC1-C625B8635990}" type="slidenum">
+              <a:rPr lang="en-US" smtClean="0"/>
+              <a:t>‹#›</a:t>
+            </a:fld>
+            <a:endParaRPr lang="en-US"/>
+          </a:p>
+        </p:txBody>
+      </p:sp>
+    </p:spTree>
+    <p:extLst>
+      <p:ext uri="{BB962C8B-B14F-4D97-AF65-F5344CB8AC3E}">
+        <p14:creationId xmlns:p14="http://schemas.microsoft.com/office/powerpoint/2010/main" val="18890696"/>
+      </p:ext>
+    </p:extLst>
+  </p:cSld>
+  <p:clrMap bg1="lt1" tx1="dk1" bg2="lt2" tx2="dk2" accent1="accent1" accent2="accent2" accent3="accent3" accent4="accent4" accent5="accent5" accent6="accent6" hlink="hlink" folHlink="folHlink"/>
+  <p:notesStyle>
+    <a:lvl1pPr marL="0" algn="l" defTabSz="914400" rtl="0" eaLnBrk="1" latinLnBrk="0" hangingPunct="1">
+      <a:defRPr sz="1200" kern="1200">
+        <a:solidFill>
+          <a:schemeClr val="tx1"/>
+        </a:solidFill>
+        <a:latin typeface="+mn-lt"/>
+        <a:ea typeface="+mn-ea"/>
+        <a:cs typeface="+mn-cs"/>
+      </a:defRPr>
+    </a:lvl1pPr>
+    <a:lvl2pPr marL="457200" algn="l" defTabSz="914400" rtl="0" eaLnBrk="1" latinLnBrk="0" hangingPunct="1">
+      <a:defRPr sz="1200" kern="1200">
+        <a:solidFill>
+          <a:schemeClr val="tx1"/>
+        </a:solidFill>
+        <a:latin typeface="+mn-lt"/>
+        <a:ea typeface="+mn-ea"/>
+        <a:cs typeface="+mn-cs"/>
+      </a:defRPr>
+    </a:lvl2pPr>
+    <a:lvl3pPr marL="914400" algn="l" defTabSz="914400" rtl="0" eaLnBrk="1" latinLnBrk="0" hangingPunct="1">
+      <a:defRPr sz="1200" kern="1200">
+        <a:solidFill>
+          <a:schemeClr val="tx1"/>
+        </a:solidFill>
+        <a:latin typeface="+mn-lt"/>
+        <a:ea typeface="+mn-ea"/>
+        <a:cs typeface="+mn-cs"/>
+      </a:defRPr>
+    </a:lvl3pPr>
+    <a:lvl4pPr marL="1371600" algn="l" defTabSz="914400" rtl="0" eaLnBrk="1" latinLnBrk="0" hangingPunct="1">
+      <a:defRPr sz="1200" kern="1200">
+        <a:solidFill>
+          <a:schemeClr val="tx1"/>
+        </a:solidFill>
+        <a:latin typeface="+mn-lt"/>
+        <a:ea typeface="+mn-ea"/>
+        <a:cs typeface="+mn-cs"/>
+      </a:defRPr>
+    </a:lvl4pPr>
+    <a:lvl5pPr marL="1828800" algn="l" defTabSz="914400" rtl="0" eaLnBrk="1" latinLnBrk="0" hangingPunct="1">
+      <a:defRPr sz="1200" kern="1200">
+        <a:solidFill>
+          <a:schemeClr val="tx1"/>
+        </a:solidFill>
+        <a:latin typeface="+mn-lt"/>
+        <a:ea typeface="+mn-ea"/>
+        <a:cs typeface="+mn-cs"/>
+      </a:defRPr>
+    </a:lvl5pPr>
+    <a:lvl6pPr marL="2286000" algn="l" defTabSz="914400" rtl="0" eaLnBrk="1" latinLnBrk="0" hangingPunct="1">
+      <a:defRPr sz="1200" kern="1200">
+        <a:solidFill>
+          <a:schemeClr val="tx1"/>
+        </a:solidFill>
+        <a:latin typeface="+mn-lt"/>
+        <a:ea typeface="+mn-ea"/>
+        <a:cs typeface="+mn-cs"/>
+      </a:defRPr>
+    </a:lvl6pPr>
+    <a:lvl7pPr marL="2743200" algn="l" defTabSz="914400" rtl="0" eaLnBrk="1" latinLnBrk="0" hangingPunct="1">
+      <a:defRPr sz="1200" kern="1200">
+        <a:solidFill>
+          <a:schemeClr val="tx1"/>
+        </a:solidFill>
+        <a:latin typeface="+mn-lt"/>
+        <a:ea typeface="+mn-ea"/>
+        <a:cs typeface="+mn-cs"/>
+      </a:defRPr>
+    </a:lvl7pPr>
+    <a:lvl8pPr marL="3200400" algn="l" defTabSz="914400" rtl="0" eaLnBrk="1" latinLnBrk="0" hangingPunct="1">
+      <a:defRPr sz="1200" kern="1200">
+        <a:solidFill>
+          <a:schemeClr val="tx1"/>
+        </a:solidFill>
+        <a:latin typeface="+mn-lt"/>
+        <a:ea typeface="+mn-ea"/>
+        <a:cs typeface="+mn-cs"/>
+      </a:defRPr>
+    </a:lvl8pPr>
+    <a:lvl9pPr marL="3657600" algn="l" defTabSz="914400" rtl="0" eaLnBrk="1" latinLnBrk="0" hangingPunct="1">
+      <a:defRPr sz="1200" kern="1200">
+        <a:solidFill>
+          <a:schemeClr val="tx1"/>
+        </a:solidFill>
+        <a:latin typeface="+mn-lt"/>
+        <a:ea typeface="+mn-ea"/>
+        <a:cs typeface="+mn-cs"/>
+      </a:defRPr>
+    </a:lvl9pPr>
+  </p:notesStyle>
+</p:notesMaster>
+</file>
+
+<file path=ppt/notesSlides/notesSlide1.xml><?xml version="1.0" encoding="utf-8"?>
+<p:notes xmlns:a="http://schemas.openxmlformats.org/drawingml/2006/main" xmlns:r="http://schemas.openxmlformats.org/officeDocument/2006/relationships" xmlns:p="http://schemas.openxmlformats.org/presentationml/2006/main">
+  <p:cSld>
+    <p:spTree>
+      <p:nvGrpSpPr>
+        <p:cNvPr id="1" name=""/>
+        <p:cNvGrpSpPr/>
+        <p:nvPr/>
+      </p:nvGrpSpPr>
+      <p:grpSpPr>
+        <a:xfrm>
+          <a:off x="0" y="0"/>
+          <a:ext cx="0" cy="0"/>
+          <a:chOff x="0" y="0"/>
+          <a:chExt cx="0" cy="0"/>
+        </a:xfrm>
+      </p:grpSpPr>
+      <p:sp>
+        <p:nvSpPr>
+          <p:cNvPr id="2" name="Slide Image Placeholder 1"/>
+          <p:cNvSpPr>
+            <a:spLocks noGrp="1" noRot="1" noChangeAspect="1"/>
+          </p:cNvSpPr>
+          <p:nvPr>
+            <p:ph type="sldImg"/>
+          </p:nvPr>
+        </p:nvSpPr>
+        <p:spPr/>
+      </p:sp>
+      <p:sp>
+        <p:nvSpPr>
+          <p:cNvPr id="3" name="Notes Placeholder 2"/>
+          <p:cNvSpPr>
+            <a:spLocks noGrp="1"/>
+          </p:cNvSpPr>
+          <p:nvPr>
+            <p:ph type="body" idx="1"/>
+          </p:nvPr>
+        </p:nvSpPr>
+        <p:spPr/>
+        <p:txBody>
+          <a:bodyPr/>
+          <a:lstStyle/>
+          <a:p>
+            <a:endParaRPr lang="en-US"/>
+          </a:p>
+        </p:txBody>
+      </p:sp>
+      <p:sp>
+        <p:nvSpPr>
+          <p:cNvPr id="4" name="Slide Number Placeholder 3"/>
+          <p:cNvSpPr>
+            <a:spLocks noGrp="1"/>
+          </p:cNvSpPr>
+          <p:nvPr>
+            <p:ph type="sldNum" sz="quarter" idx="5"/>
+          </p:nvPr>
+        </p:nvSpPr>
+        <p:spPr/>
+        <p:txBody>
+          <a:bodyPr/>
+          <a:lstStyle/>
+          <a:p>
+            <a:fld id="{A04941E9-2A29-D24C-9FC1-C625B8635990}" type="slidenum">
+              <a:rPr lang="en-US" smtClean="0"/>
+              <a:t>1</a:t>
+            </a:fld>
+            <a:endParaRPr lang="en-US"/>
+          </a:p>
+        </p:txBody>
+      </p:sp>
+    </p:spTree>
+    <p:extLst>
+      <p:ext uri="{BB962C8B-B14F-4D97-AF65-F5344CB8AC3E}">
+        <p14:creationId xmlns:p14="http://schemas.microsoft.com/office/powerpoint/2010/main" val="3464645778"/>
+      </p:ext>
+    </p:extLst>
+  </p:cSld>
+  <p:clrMapOvr>
+    <a:masterClrMapping/>
+  </p:clrMapOvr>
+</p:notes>
+</file>
+
+<file path=ppt/notesSlides/notesSlide10.xml><?xml version="1.0" encoding="utf-8"?>
+<p:notes xmlns:a="http://schemas.openxmlformats.org/drawingml/2006/main" xmlns:r="http://schemas.openxmlformats.org/officeDocument/2006/relationships" xmlns:p="http://schemas.openxmlformats.org/presentationml/2006/main">
+  <p:cSld>
+    <p:spTree>
+      <p:nvGrpSpPr>
+        <p:cNvPr id="1" name=""/>
+        <p:cNvGrpSpPr/>
+        <p:nvPr/>
+      </p:nvGrpSpPr>
+      <p:grpSpPr>
+        <a:xfrm>
+          <a:off x="0" y="0"/>
+          <a:ext cx="0" cy="0"/>
+          <a:chOff x="0" y="0"/>
+          <a:chExt cx="0" cy="0"/>
+        </a:xfrm>
+      </p:grpSpPr>
+      <p:sp>
+        <p:nvSpPr>
+          <p:cNvPr id="2" name="Slide Image Placeholder 1"/>
+          <p:cNvSpPr>
+            <a:spLocks noGrp="1" noRot="1" noChangeAspect="1"/>
+          </p:cNvSpPr>
+          <p:nvPr>
+            <p:ph type="sldImg"/>
+          </p:nvPr>
+        </p:nvSpPr>
+        <p:spPr/>
+      </p:sp>
+      <p:sp>
+        <p:nvSpPr>
+          <p:cNvPr id="3" name="Notes Placeholder 2"/>
+          <p:cNvSpPr>
+            <a:spLocks noGrp="1"/>
+          </p:cNvSpPr>
+          <p:nvPr>
+            <p:ph type="body" idx="1"/>
+          </p:nvPr>
+        </p:nvSpPr>
+        <p:spPr/>
+        <p:txBody>
+          <a:bodyPr/>
+          <a:lstStyle/>
+          <a:p>
+            <a:endParaRPr lang="en-US"/>
+          </a:p>
+        </p:txBody>
+      </p:sp>
+      <p:sp>
+        <p:nvSpPr>
+          <p:cNvPr id="4" name="Slide Number Placeholder 3"/>
+          <p:cNvSpPr>
+            <a:spLocks noGrp="1"/>
+          </p:cNvSpPr>
+          <p:nvPr>
+            <p:ph type="sldNum" sz="quarter" idx="5"/>
+          </p:nvPr>
+        </p:nvSpPr>
+        <p:spPr/>
+        <p:txBody>
+          <a:bodyPr/>
+          <a:lstStyle/>
+          <a:p>
+            <a:fld id="{A04941E9-2A29-D24C-9FC1-C625B8635990}" type="slidenum">
+              <a:rPr lang="en-US" smtClean="0"/>
+              <a:t>10</a:t>
+            </a:fld>
+            <a:endParaRPr lang="en-US"/>
+          </a:p>
+        </p:txBody>
+      </p:sp>
+    </p:spTree>
+    <p:extLst>
+      <p:ext uri="{BB962C8B-B14F-4D97-AF65-F5344CB8AC3E}">
+        <p14:creationId xmlns:p14="http://schemas.microsoft.com/office/powerpoint/2010/main" val="1201427990"/>
+      </p:ext>
+    </p:extLst>
+  </p:cSld>
+  <p:clrMapOvr>
+    <a:masterClrMapping/>
+  </p:clrMapOvr>
+</p:notes>
+</file>
+
+<file path=ppt/notesSlides/notesSlide11.xml><?xml version="1.0" encoding="utf-8"?>
+<p:notes xmlns:a="http://schemas.openxmlformats.org/drawingml/2006/main" xmlns:r="http://schemas.openxmlformats.org/officeDocument/2006/relationships" xmlns:p="http://schemas.openxmlformats.org/presentationml/2006/main">
+  <p:cSld>
+    <p:spTree>
+      <p:nvGrpSpPr>
+        <p:cNvPr id="1" name=""/>
+        <p:cNvGrpSpPr/>
+        <p:nvPr/>
+      </p:nvGrpSpPr>
+      <p:grpSpPr>
+        <a:xfrm>
+          <a:off x="0" y="0"/>
+          <a:ext cx="0" cy="0"/>
+          <a:chOff x="0" y="0"/>
+          <a:chExt cx="0" cy="0"/>
+        </a:xfrm>
+      </p:grpSpPr>
+      <p:sp>
+        <p:nvSpPr>
+          <p:cNvPr id="2" name="Slide Image Placeholder 1"/>
+          <p:cNvSpPr>
+            <a:spLocks noGrp="1" noRot="1" noChangeAspect="1"/>
+          </p:cNvSpPr>
+          <p:nvPr>
+            <p:ph type="sldImg"/>
+          </p:nvPr>
+        </p:nvSpPr>
+        <p:spPr/>
+      </p:sp>
+      <p:sp>
+        <p:nvSpPr>
+          <p:cNvPr id="3" name="Notes Placeholder 2"/>
+          <p:cNvSpPr>
+            <a:spLocks noGrp="1"/>
+          </p:cNvSpPr>
+          <p:nvPr>
+            <p:ph type="body" idx="1"/>
+          </p:nvPr>
+        </p:nvSpPr>
+        <p:spPr/>
+        <p:txBody>
+          <a:bodyPr/>
+          <a:lstStyle/>
+          <a:p>
+            <a:endParaRPr lang="en-US"/>
+          </a:p>
+        </p:txBody>
+      </p:sp>
+      <p:sp>
+        <p:nvSpPr>
+          <p:cNvPr id="4" name="Slide Number Placeholder 3"/>
+          <p:cNvSpPr>
+            <a:spLocks noGrp="1"/>
+          </p:cNvSpPr>
+          <p:nvPr>
+            <p:ph type="sldNum" sz="quarter" idx="5"/>
+          </p:nvPr>
+        </p:nvSpPr>
+        <p:spPr/>
+        <p:txBody>
+          <a:bodyPr/>
+          <a:lstStyle/>
+          <a:p>
+            <a:fld id="{A04941E9-2A29-D24C-9FC1-C625B8635990}" type="slidenum">
+              <a:rPr lang="en-US" smtClean="0"/>
+              <a:t>11</a:t>
+            </a:fld>
+            <a:endParaRPr lang="en-US"/>
+          </a:p>
+        </p:txBody>
+      </p:sp>
+    </p:spTree>
+    <p:extLst>
+      <p:ext uri="{BB962C8B-B14F-4D97-AF65-F5344CB8AC3E}">
+        <p14:creationId xmlns:p14="http://schemas.microsoft.com/office/powerpoint/2010/main" val="108951499"/>
+      </p:ext>
+    </p:extLst>
+  </p:cSld>
+  <p:clrMapOvr>
+    <a:masterClrMapping/>
+  </p:clrMapOvr>
+</p:notes>
+</file>
+
+<file path=ppt/notesSlides/notesSlide12.xml><?xml version="1.0" encoding="utf-8"?>
+<p:notes xmlns:a="http://schemas.openxmlformats.org/drawingml/2006/main" xmlns:r="http://schemas.openxmlformats.org/officeDocument/2006/relationships" xmlns:p="http://schemas.openxmlformats.org/presentationml/2006/main">
+  <p:cSld>
+    <p:spTree>
+      <p:nvGrpSpPr>
+        <p:cNvPr id="1" name=""/>
+        <p:cNvGrpSpPr/>
+        <p:nvPr/>
+      </p:nvGrpSpPr>
+      <p:grpSpPr>
+        <a:xfrm>
+          <a:off x="0" y="0"/>
+          <a:ext cx="0" cy="0"/>
+          <a:chOff x="0" y="0"/>
+          <a:chExt cx="0" cy="0"/>
+        </a:xfrm>
+      </p:grpSpPr>
+      <p:sp>
+        <p:nvSpPr>
+          <p:cNvPr id="2" name="Slide Image Placeholder 1"/>
+          <p:cNvSpPr>
+            <a:spLocks noGrp="1" noRot="1" noChangeAspect="1"/>
+          </p:cNvSpPr>
+          <p:nvPr>
+            <p:ph type="sldImg"/>
+          </p:nvPr>
+        </p:nvSpPr>
+        <p:spPr/>
+      </p:sp>
+      <p:sp>
+        <p:nvSpPr>
+          <p:cNvPr id="3" name="Notes Placeholder 2"/>
+          <p:cNvSpPr>
+            <a:spLocks noGrp="1"/>
+          </p:cNvSpPr>
+          <p:nvPr>
+            <p:ph type="body" idx="1"/>
+          </p:nvPr>
+        </p:nvSpPr>
+        <p:spPr/>
+        <p:txBody>
+          <a:bodyPr/>
+          <a:lstStyle/>
+          <a:p>
+            <a:endParaRPr lang="en-US"/>
+          </a:p>
+        </p:txBody>
+      </p:sp>
+      <p:sp>
+        <p:nvSpPr>
+          <p:cNvPr id="4" name="Slide Number Placeholder 3"/>
+          <p:cNvSpPr>
+            <a:spLocks noGrp="1"/>
+          </p:cNvSpPr>
+          <p:nvPr>
+            <p:ph type="sldNum" sz="quarter" idx="5"/>
+          </p:nvPr>
+        </p:nvSpPr>
+        <p:spPr/>
+        <p:txBody>
+          <a:bodyPr/>
+          <a:lstStyle/>
+          <a:p>
+            <a:fld id="{A04941E9-2A29-D24C-9FC1-C625B8635990}" type="slidenum">
+              <a:rPr lang="en-US" smtClean="0"/>
+              <a:t>12</a:t>
+            </a:fld>
+            <a:endParaRPr lang="en-US"/>
+          </a:p>
+        </p:txBody>
+      </p:sp>
+    </p:spTree>
+    <p:extLst>
+      <p:ext uri="{BB962C8B-B14F-4D97-AF65-F5344CB8AC3E}">
+        <p14:creationId xmlns:p14="http://schemas.microsoft.com/office/powerpoint/2010/main" val="37425260"/>
+      </p:ext>
+    </p:extLst>
+  </p:cSld>
+  <p:clrMapOvr>
+    <a:masterClrMapping/>
+  </p:clrMapOvr>
+</p:notes>
+</file>
+
+<file path=ppt/notesSlides/notesSlide13.xml><?xml version="1.0" encoding="utf-8"?>
+<p:notes xmlns:a="http://schemas.openxmlformats.org/drawingml/2006/main" xmlns:r="http://schemas.openxmlformats.org/officeDocument/2006/relationships" xmlns:p="http://schemas.openxmlformats.org/presentationml/2006/main">
+  <p:cSld>
+    <p:spTree>
+      <p:nvGrpSpPr>
+        <p:cNvPr id="1" name=""/>
+        <p:cNvGrpSpPr/>
+        <p:nvPr/>
+      </p:nvGrpSpPr>
+      <p:grpSpPr>
+        <a:xfrm>
+          <a:off x="0" y="0"/>
+          <a:ext cx="0" cy="0"/>
+          <a:chOff x="0" y="0"/>
+          <a:chExt cx="0" cy="0"/>
+        </a:xfrm>
+      </p:grpSpPr>
+      <p:sp>
+        <p:nvSpPr>
+          <p:cNvPr id="2" name="Slide Image Placeholder 1"/>
+          <p:cNvSpPr>
+            <a:spLocks noGrp="1" noRot="1" noChangeAspect="1"/>
+          </p:cNvSpPr>
+          <p:nvPr>
+            <p:ph type="sldImg"/>
+          </p:nvPr>
+        </p:nvSpPr>
+        <p:spPr/>
+      </p:sp>
+      <p:sp>
+        <p:nvSpPr>
+          <p:cNvPr id="3" name="Notes Placeholder 2"/>
+          <p:cNvSpPr>
+            <a:spLocks noGrp="1"/>
+          </p:cNvSpPr>
+          <p:nvPr>
+            <p:ph type="body" idx="1"/>
+          </p:nvPr>
+        </p:nvSpPr>
+        <p:spPr/>
+        <p:txBody>
+          <a:bodyPr/>
+          <a:lstStyle/>
+          <a:p>
+            <a:endParaRPr lang="en-US"/>
+          </a:p>
+        </p:txBody>
+      </p:sp>
+      <p:sp>
+        <p:nvSpPr>
+          <p:cNvPr id="4" name="Slide Number Placeholder 3"/>
+          <p:cNvSpPr>
+            <a:spLocks noGrp="1"/>
+          </p:cNvSpPr>
+          <p:nvPr>
+            <p:ph type="sldNum" sz="quarter" idx="5"/>
+          </p:nvPr>
+        </p:nvSpPr>
+        <p:spPr/>
+        <p:txBody>
+          <a:bodyPr/>
+          <a:lstStyle/>
+          <a:p>
+            <a:fld id="{A04941E9-2A29-D24C-9FC1-C625B8635990}" type="slidenum">
+              <a:rPr lang="en-US" smtClean="0"/>
+              <a:t>13</a:t>
+            </a:fld>
+            <a:endParaRPr lang="en-US"/>
+          </a:p>
+        </p:txBody>
+      </p:sp>
+    </p:spTree>
+    <p:extLst>
+      <p:ext uri="{BB962C8B-B14F-4D97-AF65-F5344CB8AC3E}">
+        <p14:creationId xmlns:p14="http://schemas.microsoft.com/office/powerpoint/2010/main" val="2282635270"/>
+      </p:ext>
+    </p:extLst>
+  </p:cSld>
+  <p:clrMapOvr>
+    <a:masterClrMapping/>
+  </p:clrMapOvr>
+</p:notes>
+</file>
+
+<file path=ppt/notesSlides/notesSlide14.xml><?xml version="1.0" encoding="utf-8"?>
+<p:notes xmlns:a="http://schemas.openxmlformats.org/drawingml/2006/main" xmlns:r="http://schemas.openxmlformats.org/officeDocument/2006/relationships" xmlns:p="http://schemas.openxmlformats.org/presentationml/2006/main">
+  <p:cSld>
+    <p:spTree>
+      <p:nvGrpSpPr>
+        <p:cNvPr id="1" name=""/>
+        <p:cNvGrpSpPr/>
+        <p:nvPr/>
+      </p:nvGrpSpPr>
+      <p:grpSpPr>
+        <a:xfrm>
+          <a:off x="0" y="0"/>
+          <a:ext cx="0" cy="0"/>
+          <a:chOff x="0" y="0"/>
+          <a:chExt cx="0" cy="0"/>
+        </a:xfrm>
+      </p:grpSpPr>
+      <p:sp>
+        <p:nvSpPr>
+          <p:cNvPr id="2" name="Slide Image Placeholder 1"/>
+          <p:cNvSpPr>
+            <a:spLocks noGrp="1" noRot="1" noChangeAspect="1"/>
+          </p:cNvSpPr>
+          <p:nvPr>
+            <p:ph type="sldImg"/>
+          </p:nvPr>
+        </p:nvSpPr>
+        <p:spPr/>
+      </p:sp>
+      <p:sp>
+        <p:nvSpPr>
+          <p:cNvPr id="3" name="Notes Placeholder 2"/>
+          <p:cNvSpPr>
+            <a:spLocks noGrp="1"/>
+          </p:cNvSpPr>
+          <p:nvPr>
+            <p:ph type="body" idx="1"/>
+          </p:nvPr>
+        </p:nvSpPr>
+        <p:spPr/>
+        <p:txBody>
+          <a:bodyPr/>
+          <a:lstStyle/>
+          <a:p>
+            <a:endParaRPr lang="en-US"/>
+          </a:p>
+        </p:txBody>
+      </p:sp>
+      <p:sp>
+        <p:nvSpPr>
+          <p:cNvPr id="4" name="Slide Number Placeholder 3"/>
+          <p:cNvSpPr>
+            <a:spLocks noGrp="1"/>
+          </p:cNvSpPr>
+          <p:nvPr>
+            <p:ph type="sldNum" sz="quarter" idx="5"/>
+          </p:nvPr>
+        </p:nvSpPr>
+        <p:spPr/>
+        <p:txBody>
+          <a:bodyPr/>
+          <a:lstStyle/>
+          <a:p>
+            <a:fld id="{A04941E9-2A29-D24C-9FC1-C625B8635990}" type="slidenum">
+              <a:rPr lang="en-US" smtClean="0"/>
+              <a:t>14</a:t>
+            </a:fld>
+            <a:endParaRPr lang="en-US"/>
+          </a:p>
+        </p:txBody>
+      </p:sp>
+    </p:spTree>
+    <p:extLst>
+      <p:ext uri="{BB962C8B-B14F-4D97-AF65-F5344CB8AC3E}">
+        <p14:creationId xmlns:p14="http://schemas.microsoft.com/office/powerpoint/2010/main" val="4268194215"/>
+      </p:ext>
+    </p:extLst>
+  </p:cSld>
+  <p:clrMapOvr>
+    <a:masterClrMapping/>
+  </p:clrMapOvr>
+</p:notes>
+</file>
+
+<file path=ppt/notesSlides/notesSlide15.xml><?xml version="1.0" encoding="utf-8"?>
+<p:notes xmlns:a="http://schemas.openxmlformats.org/drawingml/2006/main" xmlns:r="http://schemas.openxmlformats.org/officeDocument/2006/relationships" xmlns:p="http://schemas.openxmlformats.org/presentationml/2006/main">
+  <p:cSld>
+    <p:spTree>
+      <p:nvGrpSpPr>
+        <p:cNvPr id="1" name=""/>
+        <p:cNvGrpSpPr/>
+        <p:nvPr/>
+      </p:nvGrpSpPr>
+      <p:grpSpPr>
+        <a:xfrm>
+          <a:off x="0" y="0"/>
+          <a:ext cx="0" cy="0"/>
+          <a:chOff x="0" y="0"/>
+          <a:chExt cx="0" cy="0"/>
+        </a:xfrm>
+      </p:grpSpPr>
+      <p:sp>
+        <p:nvSpPr>
+          <p:cNvPr id="2" name="Slide Image Placeholder 1"/>
+          <p:cNvSpPr>
+            <a:spLocks noGrp="1" noRot="1" noChangeAspect="1"/>
+          </p:cNvSpPr>
+          <p:nvPr>
+            <p:ph type="sldImg"/>
+          </p:nvPr>
+        </p:nvSpPr>
+        <p:spPr/>
+      </p:sp>
+      <p:sp>
+        <p:nvSpPr>
+          <p:cNvPr id="3" name="Notes Placeholder 2"/>
+          <p:cNvSpPr>
+            <a:spLocks noGrp="1"/>
+          </p:cNvSpPr>
+          <p:nvPr>
+            <p:ph type="body" idx="1"/>
+          </p:nvPr>
+        </p:nvSpPr>
+        <p:spPr/>
+        <p:txBody>
+          <a:bodyPr/>
+          <a:lstStyle/>
+          <a:p>
+            <a:endParaRPr lang="en-US"/>
+          </a:p>
+        </p:txBody>
+      </p:sp>
+      <p:sp>
+        <p:nvSpPr>
+          <p:cNvPr id="4" name="Slide Number Placeholder 3"/>
+          <p:cNvSpPr>
+            <a:spLocks noGrp="1"/>
+          </p:cNvSpPr>
+          <p:nvPr>
+            <p:ph type="sldNum" sz="quarter" idx="5"/>
+          </p:nvPr>
+        </p:nvSpPr>
+        <p:spPr/>
+        <p:txBody>
+          <a:bodyPr/>
+          <a:lstStyle/>
+          <a:p>
+            <a:fld id="{A04941E9-2A29-D24C-9FC1-C625B8635990}" type="slidenum">
+              <a:rPr lang="en-US" smtClean="0"/>
+              <a:t>15</a:t>
+            </a:fld>
+            <a:endParaRPr lang="en-US"/>
+          </a:p>
+        </p:txBody>
+      </p:sp>
+    </p:spTree>
+    <p:extLst>
+      <p:ext uri="{BB962C8B-B14F-4D97-AF65-F5344CB8AC3E}">
+        <p14:creationId xmlns:p14="http://schemas.microsoft.com/office/powerpoint/2010/main" val="980987647"/>
+      </p:ext>
+    </p:extLst>
+  </p:cSld>
+  <p:clrMapOvr>
+    <a:masterClrMapping/>
+  </p:clrMapOvr>
+</p:notes>
+</file>
+
+<file path=ppt/notesSlides/notesSlide16.xml><?xml version="1.0" encoding="utf-8"?>
+<p:notes xmlns:a="http://schemas.openxmlformats.org/drawingml/2006/main" xmlns:r="http://schemas.openxmlformats.org/officeDocument/2006/relationships" xmlns:p="http://schemas.openxmlformats.org/presentationml/2006/main">
+  <p:cSld>
+    <p:spTree>
+      <p:nvGrpSpPr>
+        <p:cNvPr id="1" name=""/>
+        <p:cNvGrpSpPr/>
+        <p:nvPr/>
+      </p:nvGrpSpPr>
+      <p:grpSpPr>
+        <a:xfrm>
+          <a:off x="0" y="0"/>
+          <a:ext cx="0" cy="0"/>
+          <a:chOff x="0" y="0"/>
+          <a:chExt cx="0" cy="0"/>
+        </a:xfrm>
+      </p:grpSpPr>
+      <p:sp>
+        <p:nvSpPr>
+          <p:cNvPr id="2" name="Slide Image Placeholder 1"/>
+          <p:cNvSpPr>
+            <a:spLocks noGrp="1" noRot="1" noChangeAspect="1"/>
+          </p:cNvSpPr>
+          <p:nvPr>
+            <p:ph type="sldImg"/>
+          </p:nvPr>
+        </p:nvSpPr>
+        <p:spPr/>
+      </p:sp>
+      <p:sp>
+        <p:nvSpPr>
+          <p:cNvPr id="3" name="Notes Placeholder 2"/>
+          <p:cNvSpPr>
+            <a:spLocks noGrp="1"/>
+          </p:cNvSpPr>
+          <p:nvPr>
+            <p:ph type="body" idx="1"/>
+          </p:nvPr>
+        </p:nvSpPr>
+        <p:spPr/>
+        <p:txBody>
+          <a:bodyPr/>
+          <a:lstStyle/>
+          <a:p>
+            <a:endParaRPr lang="en-US"/>
+          </a:p>
+        </p:txBody>
+      </p:sp>
+      <p:sp>
+        <p:nvSpPr>
+          <p:cNvPr id="4" name="Slide Number Placeholder 3"/>
+          <p:cNvSpPr>
+            <a:spLocks noGrp="1"/>
+          </p:cNvSpPr>
+          <p:nvPr>
+            <p:ph type="sldNum" sz="quarter" idx="5"/>
+          </p:nvPr>
+        </p:nvSpPr>
+        <p:spPr/>
+        <p:txBody>
+          <a:bodyPr/>
+          <a:lstStyle/>
+          <a:p>
+            <a:fld id="{A04941E9-2A29-D24C-9FC1-C625B8635990}" type="slidenum">
+              <a:rPr lang="en-US" smtClean="0"/>
+              <a:t>16</a:t>
+            </a:fld>
+            <a:endParaRPr lang="en-US"/>
+          </a:p>
+        </p:txBody>
+      </p:sp>
+    </p:spTree>
+    <p:extLst>
+      <p:ext uri="{BB962C8B-B14F-4D97-AF65-F5344CB8AC3E}">
+        <p14:creationId xmlns:p14="http://schemas.microsoft.com/office/powerpoint/2010/main" val="2024919063"/>
+      </p:ext>
+    </p:extLst>
+  </p:cSld>
+  <p:clrMapOvr>
+    <a:masterClrMapping/>
+  </p:clrMapOvr>
+</p:notes>
+</file>
+
+<file path=ppt/notesSlides/notesSlide17.xml><?xml version="1.0" encoding="utf-8"?>
+<p:notes xmlns:a="http://schemas.openxmlformats.org/drawingml/2006/main" xmlns:r="http://schemas.openxmlformats.org/officeDocument/2006/relationships" xmlns:p="http://schemas.openxmlformats.org/presentationml/2006/main">
+  <p:cSld>
+    <p:spTree>
+      <p:nvGrpSpPr>
+        <p:cNvPr id="1" name=""/>
+        <p:cNvGrpSpPr/>
+        <p:nvPr/>
+      </p:nvGrpSpPr>
+      <p:grpSpPr>
+        <a:xfrm>
+          <a:off x="0" y="0"/>
+          <a:ext cx="0" cy="0"/>
+          <a:chOff x="0" y="0"/>
+          <a:chExt cx="0" cy="0"/>
+        </a:xfrm>
+      </p:grpSpPr>
+      <p:sp>
+        <p:nvSpPr>
+          <p:cNvPr id="2" name="Slide Image Placeholder 1"/>
+          <p:cNvSpPr>
+            <a:spLocks noGrp="1" noRot="1" noChangeAspect="1"/>
+          </p:cNvSpPr>
+          <p:nvPr>
+            <p:ph type="sldImg"/>
+          </p:nvPr>
+        </p:nvSpPr>
+        <p:spPr/>
+      </p:sp>
+      <p:sp>
+        <p:nvSpPr>
+          <p:cNvPr id="3" name="Notes Placeholder 2"/>
+          <p:cNvSpPr>
+            <a:spLocks noGrp="1"/>
+          </p:cNvSpPr>
+          <p:nvPr>
+            <p:ph type="body" idx="1"/>
+          </p:nvPr>
+        </p:nvSpPr>
+        <p:spPr/>
+        <p:txBody>
+          <a:bodyPr/>
+          <a:lstStyle/>
+          <a:p>
+            <a:endParaRPr lang="en-US"/>
+          </a:p>
+        </p:txBody>
+      </p:sp>
+      <p:sp>
+        <p:nvSpPr>
+          <p:cNvPr id="4" name="Slide Number Placeholder 3"/>
+          <p:cNvSpPr>
+            <a:spLocks noGrp="1"/>
+          </p:cNvSpPr>
+          <p:nvPr>
+            <p:ph type="sldNum" sz="quarter" idx="5"/>
+          </p:nvPr>
+        </p:nvSpPr>
+        <p:spPr/>
+        <p:txBody>
+          <a:bodyPr/>
+          <a:lstStyle/>
+          <a:p>
+            <a:fld id="{A04941E9-2A29-D24C-9FC1-C625B8635990}" type="slidenum">
+              <a:rPr lang="en-US" smtClean="0"/>
+              <a:t>17</a:t>
+            </a:fld>
+            <a:endParaRPr lang="en-US"/>
+          </a:p>
+        </p:txBody>
+      </p:sp>
+    </p:spTree>
+    <p:extLst>
+      <p:ext uri="{BB962C8B-B14F-4D97-AF65-F5344CB8AC3E}">
+        <p14:creationId xmlns:p14="http://schemas.microsoft.com/office/powerpoint/2010/main" val="1112455782"/>
+      </p:ext>
+    </p:extLst>
+  </p:cSld>
+  <p:clrMapOvr>
+    <a:masterClrMapping/>
+  </p:clrMapOvr>
+</p:notes>
+</file>
+
+<file path=ppt/notesSlides/notesSlide18.xml><?xml version="1.0" encoding="utf-8"?>
+<p:notes xmlns:a="http://schemas.openxmlformats.org/drawingml/2006/main" xmlns:r="http://schemas.openxmlformats.org/officeDocument/2006/relationships" xmlns:p="http://schemas.openxmlformats.org/presentationml/2006/main">
+  <p:cSld>
+    <p:spTree>
+      <p:nvGrpSpPr>
+        <p:cNvPr id="1" name=""/>
+        <p:cNvGrpSpPr/>
+        <p:nvPr/>
+      </p:nvGrpSpPr>
+      <p:grpSpPr>
+        <a:xfrm>
+          <a:off x="0" y="0"/>
+          <a:ext cx="0" cy="0"/>
+          <a:chOff x="0" y="0"/>
+          <a:chExt cx="0" cy="0"/>
+        </a:xfrm>
+      </p:grpSpPr>
+      <p:sp>
+        <p:nvSpPr>
+          <p:cNvPr id="2" name="Slide Image Placeholder 1"/>
+          <p:cNvSpPr>
+            <a:spLocks noGrp="1" noRot="1" noChangeAspect="1"/>
+          </p:cNvSpPr>
+          <p:nvPr>
+            <p:ph type="sldImg"/>
+          </p:nvPr>
+        </p:nvSpPr>
+        <p:spPr/>
+      </p:sp>
+      <p:sp>
+        <p:nvSpPr>
+          <p:cNvPr id="3" name="Notes Placeholder 2"/>
+          <p:cNvSpPr>
+            <a:spLocks noGrp="1"/>
+          </p:cNvSpPr>
+          <p:nvPr>
+            <p:ph type="body" idx="1"/>
+          </p:nvPr>
+        </p:nvSpPr>
+        <p:spPr/>
+        <p:txBody>
+          <a:bodyPr/>
+          <a:lstStyle/>
+          <a:p>
+            <a:endParaRPr lang="en-US"/>
+          </a:p>
+        </p:txBody>
+      </p:sp>
+      <p:sp>
+        <p:nvSpPr>
+          <p:cNvPr id="4" name="Slide Number Placeholder 3"/>
+          <p:cNvSpPr>
+            <a:spLocks noGrp="1"/>
+          </p:cNvSpPr>
+          <p:nvPr>
+            <p:ph type="sldNum" sz="quarter" idx="5"/>
+          </p:nvPr>
+        </p:nvSpPr>
+        <p:spPr/>
+        <p:txBody>
+          <a:bodyPr/>
+          <a:lstStyle/>
+          <a:p>
+            <a:fld id="{A04941E9-2A29-D24C-9FC1-C625B8635990}" type="slidenum">
+              <a:rPr lang="en-US" smtClean="0"/>
+              <a:t>18</a:t>
+            </a:fld>
+            <a:endParaRPr lang="en-US"/>
+          </a:p>
+        </p:txBody>
+      </p:sp>
+    </p:spTree>
+    <p:extLst>
+      <p:ext uri="{BB962C8B-B14F-4D97-AF65-F5344CB8AC3E}">
+        <p14:creationId xmlns:p14="http://schemas.microsoft.com/office/powerpoint/2010/main" val="2448581481"/>
+      </p:ext>
+    </p:extLst>
+  </p:cSld>
+  <p:clrMapOvr>
+    <a:masterClrMapping/>
+  </p:clrMapOvr>
+</p:notes>
+</file>
+
+<file path=ppt/notesSlides/notesSlide19.xml><?xml version="1.0" encoding="utf-8"?>
+<p:notes xmlns:a="http://schemas.openxmlformats.org/drawingml/2006/main" xmlns:r="http://schemas.openxmlformats.org/officeDocument/2006/relationships" xmlns:p="http://schemas.openxmlformats.org/presentationml/2006/main">
+  <p:cSld>
+    <p:spTree>
+      <p:nvGrpSpPr>
+        <p:cNvPr id="1" name=""/>
+        <p:cNvGrpSpPr/>
+        <p:nvPr/>
+      </p:nvGrpSpPr>
+      <p:grpSpPr>
+        <a:xfrm>
+          <a:off x="0" y="0"/>
+          <a:ext cx="0" cy="0"/>
+          <a:chOff x="0" y="0"/>
+          <a:chExt cx="0" cy="0"/>
+        </a:xfrm>
+      </p:grpSpPr>
+      <p:sp>
+        <p:nvSpPr>
+          <p:cNvPr id="2" name="Slide Image Placeholder 1"/>
+          <p:cNvSpPr>
+            <a:spLocks noGrp="1" noRot="1" noChangeAspect="1"/>
+          </p:cNvSpPr>
+          <p:nvPr>
+            <p:ph type="sldImg"/>
+          </p:nvPr>
+        </p:nvSpPr>
+        <p:spPr/>
+      </p:sp>
+      <p:sp>
+        <p:nvSpPr>
+          <p:cNvPr id="3" name="Notes Placeholder 2"/>
+          <p:cNvSpPr>
+            <a:spLocks noGrp="1"/>
+          </p:cNvSpPr>
+          <p:nvPr>
+            <p:ph type="body" idx="1"/>
+          </p:nvPr>
+        </p:nvSpPr>
+        <p:spPr/>
+        <p:txBody>
+          <a:bodyPr/>
+          <a:lstStyle/>
+          <a:p>
+            <a:endParaRPr lang="en-US"/>
+          </a:p>
+        </p:txBody>
+      </p:sp>
+      <p:sp>
+        <p:nvSpPr>
+          <p:cNvPr id="4" name="Slide Number Placeholder 3"/>
+          <p:cNvSpPr>
+            <a:spLocks noGrp="1"/>
+          </p:cNvSpPr>
+          <p:nvPr>
+            <p:ph type="sldNum" sz="quarter" idx="5"/>
+          </p:nvPr>
+        </p:nvSpPr>
+        <p:spPr/>
+        <p:txBody>
+          <a:bodyPr/>
+          <a:lstStyle/>
+          <a:p>
+            <a:fld id="{A04941E9-2A29-D24C-9FC1-C625B8635990}" type="slidenum">
+              <a:rPr lang="en-US" smtClean="0"/>
+              <a:t>19</a:t>
+            </a:fld>
+            <a:endParaRPr lang="en-US"/>
+          </a:p>
+        </p:txBody>
+      </p:sp>
+    </p:spTree>
+    <p:extLst>
+      <p:ext uri="{BB962C8B-B14F-4D97-AF65-F5344CB8AC3E}">
+        <p14:creationId xmlns:p14="http://schemas.microsoft.com/office/powerpoint/2010/main" val="3905497098"/>
+      </p:ext>
+    </p:extLst>
+  </p:cSld>
+  <p:clrMapOvr>
+    <a:masterClrMapping/>
+  </p:clrMapOvr>
+</p:notes>
+</file>
+
+<file path=ppt/notesSlides/notesSlide2.xml><?xml version="1.0" encoding="utf-8"?>
+<p:notes xmlns:a="http://schemas.openxmlformats.org/drawingml/2006/main" xmlns:r="http://schemas.openxmlformats.org/officeDocument/2006/relationships" xmlns:p="http://schemas.openxmlformats.org/presentationml/2006/main">
+  <p:cSld>
+    <p:spTree>
+      <p:nvGrpSpPr>
+        <p:cNvPr id="1" name=""/>
+        <p:cNvGrpSpPr/>
+        <p:nvPr/>
+      </p:nvGrpSpPr>
+      <p:grpSpPr>
+        <a:xfrm>
+          <a:off x="0" y="0"/>
+          <a:ext cx="0" cy="0"/>
+          <a:chOff x="0" y="0"/>
+          <a:chExt cx="0" cy="0"/>
+        </a:xfrm>
+      </p:grpSpPr>
+      <p:sp>
+        <p:nvSpPr>
+          <p:cNvPr id="2" name="Slide Image Placeholder 1"/>
+          <p:cNvSpPr>
+            <a:spLocks noGrp="1" noRot="1" noChangeAspect="1"/>
+          </p:cNvSpPr>
+          <p:nvPr>
+            <p:ph type="sldImg"/>
+          </p:nvPr>
+        </p:nvSpPr>
+        <p:spPr/>
+      </p:sp>
+      <p:sp>
+        <p:nvSpPr>
+          <p:cNvPr id="3" name="Notes Placeholder 2"/>
+          <p:cNvSpPr>
+            <a:spLocks noGrp="1"/>
+          </p:cNvSpPr>
+          <p:nvPr>
+            <p:ph type="body" idx="1"/>
+          </p:nvPr>
+        </p:nvSpPr>
+        <p:spPr/>
+        <p:txBody>
+          <a:bodyPr/>
+          <a:lstStyle/>
+          <a:p>
+            <a:endParaRPr lang="en-US"/>
+          </a:p>
+        </p:txBody>
+      </p:sp>
+      <p:sp>
+        <p:nvSpPr>
+          <p:cNvPr id="4" name="Slide Number Placeholder 3"/>
+          <p:cNvSpPr>
+            <a:spLocks noGrp="1"/>
+          </p:cNvSpPr>
+          <p:nvPr>
+            <p:ph type="sldNum" sz="quarter" idx="5"/>
+          </p:nvPr>
+        </p:nvSpPr>
+        <p:spPr/>
+        <p:txBody>
+          <a:bodyPr/>
+          <a:lstStyle/>
+          <a:p>
+            <a:fld id="{A04941E9-2A29-D24C-9FC1-C625B8635990}" type="slidenum">
+              <a:rPr lang="en-US" smtClean="0"/>
+              <a:t>2</a:t>
+            </a:fld>
+            <a:endParaRPr lang="en-US"/>
+          </a:p>
+        </p:txBody>
+      </p:sp>
+    </p:spTree>
+    <p:extLst>
+      <p:ext uri="{BB962C8B-B14F-4D97-AF65-F5344CB8AC3E}">
+        <p14:creationId xmlns:p14="http://schemas.microsoft.com/office/powerpoint/2010/main" val="891545348"/>
+      </p:ext>
+    </p:extLst>
+  </p:cSld>
+  <p:clrMapOvr>
+    <a:masterClrMapping/>
+  </p:clrMapOvr>
+</p:notes>
+</file>
+
+<file path=ppt/notesSlides/notesSlide20.xml><?xml version="1.0" encoding="utf-8"?>
+<p:notes xmlns:a="http://schemas.openxmlformats.org/drawingml/2006/main" xmlns:r="http://schemas.openxmlformats.org/officeDocument/2006/relationships" xmlns:p="http://schemas.openxmlformats.org/presentationml/2006/main">
+  <p:cSld>
+    <p:spTree>
+      <p:nvGrpSpPr>
+        <p:cNvPr id="1" name=""/>
+        <p:cNvGrpSpPr/>
+        <p:nvPr/>
+      </p:nvGrpSpPr>
+      <p:grpSpPr>
+        <a:xfrm>
+          <a:off x="0" y="0"/>
+          <a:ext cx="0" cy="0"/>
+          <a:chOff x="0" y="0"/>
+          <a:chExt cx="0" cy="0"/>
+        </a:xfrm>
+      </p:grpSpPr>
+      <p:sp>
+        <p:nvSpPr>
+          <p:cNvPr id="2" name="Slide Image Placeholder 1"/>
+          <p:cNvSpPr>
+            <a:spLocks noGrp="1" noRot="1" noChangeAspect="1"/>
+          </p:cNvSpPr>
+          <p:nvPr>
+            <p:ph type="sldImg"/>
+          </p:nvPr>
+        </p:nvSpPr>
+        <p:spPr/>
+      </p:sp>
+      <p:sp>
+        <p:nvSpPr>
+          <p:cNvPr id="3" name="Notes Placeholder 2"/>
+          <p:cNvSpPr>
+            <a:spLocks noGrp="1"/>
+          </p:cNvSpPr>
+          <p:nvPr>
+            <p:ph type="body" idx="1"/>
+          </p:nvPr>
+        </p:nvSpPr>
+        <p:spPr/>
+        <p:txBody>
+          <a:bodyPr/>
+          <a:lstStyle/>
+          <a:p>
+            <a:endParaRPr lang="en-US"/>
+          </a:p>
+        </p:txBody>
+      </p:sp>
+      <p:sp>
+        <p:nvSpPr>
+          <p:cNvPr id="4" name="Slide Number Placeholder 3"/>
+          <p:cNvSpPr>
+            <a:spLocks noGrp="1"/>
+          </p:cNvSpPr>
+          <p:nvPr>
+            <p:ph type="sldNum" sz="quarter" idx="5"/>
+          </p:nvPr>
+        </p:nvSpPr>
+        <p:spPr/>
+        <p:txBody>
+          <a:bodyPr/>
+          <a:lstStyle/>
+          <a:p>
+            <a:fld id="{A04941E9-2A29-D24C-9FC1-C625B8635990}" type="slidenum">
+              <a:rPr lang="en-US" smtClean="0"/>
+              <a:t>20</a:t>
+            </a:fld>
+            <a:endParaRPr lang="en-US"/>
+          </a:p>
+        </p:txBody>
+      </p:sp>
+    </p:spTree>
+    <p:extLst>
+      <p:ext uri="{BB962C8B-B14F-4D97-AF65-F5344CB8AC3E}">
+        <p14:creationId xmlns:p14="http://schemas.microsoft.com/office/powerpoint/2010/main" val="640542807"/>
+      </p:ext>
+    </p:extLst>
+  </p:cSld>
+  <p:clrMapOvr>
+    <a:masterClrMapping/>
+  </p:clrMapOvr>
+</p:notes>
+</file>
+
+<file path=ppt/notesSlides/notesSlide21.xml><?xml version="1.0" encoding="utf-8"?>
+<p:notes xmlns:a="http://schemas.openxmlformats.org/drawingml/2006/main" xmlns:r="http://schemas.openxmlformats.org/officeDocument/2006/relationships" xmlns:p="http://schemas.openxmlformats.org/presentationml/2006/main">
+  <p:cSld>
+    <p:spTree>
+      <p:nvGrpSpPr>
+        <p:cNvPr id="1" name=""/>
+        <p:cNvGrpSpPr/>
+        <p:nvPr/>
+      </p:nvGrpSpPr>
+      <p:grpSpPr>
+        <a:xfrm>
+          <a:off x="0" y="0"/>
+          <a:ext cx="0" cy="0"/>
+          <a:chOff x="0" y="0"/>
+          <a:chExt cx="0" cy="0"/>
+        </a:xfrm>
+      </p:grpSpPr>
+      <p:sp>
+        <p:nvSpPr>
+          <p:cNvPr id="2" name="Slide Image Placeholder 1"/>
+          <p:cNvSpPr>
+            <a:spLocks noGrp="1" noRot="1" noChangeAspect="1"/>
+          </p:cNvSpPr>
+          <p:nvPr>
+            <p:ph type="sldImg"/>
+          </p:nvPr>
+        </p:nvSpPr>
+        <p:spPr/>
+      </p:sp>
+      <p:sp>
+        <p:nvSpPr>
+          <p:cNvPr id="3" name="Notes Placeholder 2"/>
+          <p:cNvSpPr>
+            <a:spLocks noGrp="1"/>
+          </p:cNvSpPr>
+          <p:nvPr>
+            <p:ph type="body" idx="1"/>
+          </p:nvPr>
+        </p:nvSpPr>
+        <p:spPr/>
+        <p:txBody>
+          <a:bodyPr/>
+          <a:lstStyle/>
+          <a:p>
+            <a:endParaRPr lang="en-US"/>
+          </a:p>
+        </p:txBody>
+      </p:sp>
+      <p:sp>
+        <p:nvSpPr>
+          <p:cNvPr id="4" name="Slide Number Placeholder 3"/>
+          <p:cNvSpPr>
+            <a:spLocks noGrp="1"/>
+          </p:cNvSpPr>
+          <p:nvPr>
+            <p:ph type="sldNum" sz="quarter" idx="5"/>
+          </p:nvPr>
+        </p:nvSpPr>
+        <p:spPr/>
+        <p:txBody>
+          <a:bodyPr/>
+          <a:lstStyle/>
+          <a:p>
+            <a:fld id="{A04941E9-2A29-D24C-9FC1-C625B8635990}" type="slidenum">
+              <a:rPr lang="en-US" smtClean="0"/>
+              <a:t>21</a:t>
+            </a:fld>
+            <a:endParaRPr lang="en-US"/>
+          </a:p>
+        </p:txBody>
+      </p:sp>
+    </p:spTree>
+    <p:extLst>
+      <p:ext uri="{BB962C8B-B14F-4D97-AF65-F5344CB8AC3E}">
+        <p14:creationId xmlns:p14="http://schemas.microsoft.com/office/powerpoint/2010/main" val="2135878816"/>
+      </p:ext>
+    </p:extLst>
+  </p:cSld>
+  <p:clrMapOvr>
+    <a:masterClrMapping/>
+  </p:clrMapOvr>
+</p:notes>
+</file>
+
+<file path=ppt/notesSlides/notesSlide22.xml><?xml version="1.0" encoding="utf-8"?>
+<p:notes xmlns:a="http://schemas.openxmlformats.org/drawingml/2006/main" xmlns:r="http://schemas.openxmlformats.org/officeDocument/2006/relationships" xmlns:p="http://schemas.openxmlformats.org/presentationml/2006/main">
+  <p:cSld>
+    <p:spTree>
+      <p:nvGrpSpPr>
+        <p:cNvPr id="1" name=""/>
+        <p:cNvGrpSpPr/>
+        <p:nvPr/>
+      </p:nvGrpSpPr>
+      <p:grpSpPr>
+        <a:xfrm>
+          <a:off x="0" y="0"/>
+          <a:ext cx="0" cy="0"/>
+          <a:chOff x="0" y="0"/>
+          <a:chExt cx="0" cy="0"/>
+        </a:xfrm>
+      </p:grpSpPr>
+      <p:sp>
+        <p:nvSpPr>
+          <p:cNvPr id="2" name="Slide Image Placeholder 1"/>
+          <p:cNvSpPr>
+            <a:spLocks noGrp="1" noRot="1" noChangeAspect="1"/>
+          </p:cNvSpPr>
+          <p:nvPr>
+            <p:ph type="sldImg"/>
+          </p:nvPr>
+        </p:nvSpPr>
+        <p:spPr/>
+      </p:sp>
+      <p:sp>
+        <p:nvSpPr>
+          <p:cNvPr id="3" name="Notes Placeholder 2"/>
+          <p:cNvSpPr>
+            <a:spLocks noGrp="1"/>
+          </p:cNvSpPr>
+          <p:nvPr>
+            <p:ph type="body" idx="1"/>
+          </p:nvPr>
+        </p:nvSpPr>
+        <p:spPr/>
+        <p:txBody>
+          <a:bodyPr/>
+          <a:lstStyle/>
+          <a:p>
+            <a:endParaRPr lang="en-US"/>
+          </a:p>
+        </p:txBody>
+      </p:sp>
+      <p:sp>
+        <p:nvSpPr>
+          <p:cNvPr id="4" name="Slide Number Placeholder 3"/>
+          <p:cNvSpPr>
+            <a:spLocks noGrp="1"/>
+          </p:cNvSpPr>
+          <p:nvPr>
+            <p:ph type="sldNum" sz="quarter" idx="5"/>
+          </p:nvPr>
+        </p:nvSpPr>
+        <p:spPr/>
+        <p:txBody>
+          <a:bodyPr/>
+          <a:lstStyle/>
+          <a:p>
+            <a:fld id="{A04941E9-2A29-D24C-9FC1-C625B8635990}" type="slidenum">
+              <a:rPr lang="en-US" smtClean="0"/>
+              <a:t>22</a:t>
+            </a:fld>
+            <a:endParaRPr lang="en-US"/>
+          </a:p>
+        </p:txBody>
+      </p:sp>
+    </p:spTree>
+    <p:extLst>
+      <p:ext uri="{BB962C8B-B14F-4D97-AF65-F5344CB8AC3E}">
+        <p14:creationId xmlns:p14="http://schemas.microsoft.com/office/powerpoint/2010/main" val="2600920529"/>
+      </p:ext>
+    </p:extLst>
+  </p:cSld>
+  <p:clrMapOvr>
+    <a:masterClrMapping/>
+  </p:clrMapOvr>
+</p:notes>
+</file>
+
+<file path=ppt/notesSlides/notesSlide23.xml><?xml version="1.0" encoding="utf-8"?>
+<p:notes xmlns:a="http://schemas.openxmlformats.org/drawingml/2006/main" xmlns:r="http://schemas.openxmlformats.org/officeDocument/2006/relationships" xmlns:p="http://schemas.openxmlformats.org/presentationml/2006/main">
+  <p:cSld>
+    <p:spTree>
+      <p:nvGrpSpPr>
+        <p:cNvPr id="1" name=""/>
+        <p:cNvGrpSpPr/>
+        <p:nvPr/>
+      </p:nvGrpSpPr>
+      <p:grpSpPr>
+        <a:xfrm>
+          <a:off x="0" y="0"/>
+          <a:ext cx="0" cy="0"/>
+          <a:chOff x="0" y="0"/>
+          <a:chExt cx="0" cy="0"/>
+        </a:xfrm>
+      </p:grpSpPr>
+      <p:sp>
+        <p:nvSpPr>
+          <p:cNvPr id="2" name="Slide Image Placeholder 1"/>
+          <p:cNvSpPr>
+            <a:spLocks noGrp="1" noRot="1" noChangeAspect="1"/>
+          </p:cNvSpPr>
+          <p:nvPr>
+            <p:ph type="sldImg"/>
+          </p:nvPr>
+        </p:nvSpPr>
+        <p:spPr/>
+      </p:sp>
+      <p:sp>
+        <p:nvSpPr>
+          <p:cNvPr id="3" name="Notes Placeholder 2"/>
+          <p:cNvSpPr>
+            <a:spLocks noGrp="1"/>
+          </p:cNvSpPr>
+          <p:nvPr>
+            <p:ph type="body" idx="1"/>
+          </p:nvPr>
+        </p:nvSpPr>
+        <p:spPr/>
+        <p:txBody>
+          <a:bodyPr/>
+          <a:lstStyle/>
+          <a:p>
+            <a:endParaRPr lang="en-US"/>
+          </a:p>
+        </p:txBody>
+      </p:sp>
+      <p:sp>
+        <p:nvSpPr>
+          <p:cNvPr id="4" name="Slide Number Placeholder 3"/>
+          <p:cNvSpPr>
+            <a:spLocks noGrp="1"/>
+          </p:cNvSpPr>
+          <p:nvPr>
+            <p:ph type="sldNum" sz="quarter" idx="5"/>
+          </p:nvPr>
+        </p:nvSpPr>
+        <p:spPr/>
+        <p:txBody>
+          <a:bodyPr/>
+          <a:lstStyle/>
+          <a:p>
+            <a:fld id="{A04941E9-2A29-D24C-9FC1-C625B8635990}" type="slidenum">
+              <a:rPr lang="en-US" smtClean="0"/>
+              <a:t>23</a:t>
+            </a:fld>
+            <a:endParaRPr lang="en-US"/>
+          </a:p>
+        </p:txBody>
+      </p:sp>
+    </p:spTree>
+    <p:extLst>
+      <p:ext uri="{BB962C8B-B14F-4D97-AF65-F5344CB8AC3E}">
+        <p14:creationId xmlns:p14="http://schemas.microsoft.com/office/powerpoint/2010/main" val="1650126679"/>
+      </p:ext>
+    </p:extLst>
+  </p:cSld>
+  <p:clrMapOvr>
+    <a:masterClrMapping/>
+  </p:clrMapOvr>
+</p:notes>
+</file>
+
+<file path=ppt/notesSlides/notesSlide24.xml><?xml version="1.0" encoding="utf-8"?>
+<p:notes xmlns:a="http://schemas.openxmlformats.org/drawingml/2006/main" xmlns:r="http://schemas.openxmlformats.org/officeDocument/2006/relationships" xmlns:p="http://schemas.openxmlformats.org/presentationml/2006/main">
+  <p:cSld>
+    <p:spTree>
+      <p:nvGrpSpPr>
+        <p:cNvPr id="1" name=""/>
+        <p:cNvGrpSpPr/>
+        <p:nvPr/>
+      </p:nvGrpSpPr>
+      <p:grpSpPr>
+        <a:xfrm>
+          <a:off x="0" y="0"/>
+          <a:ext cx="0" cy="0"/>
+          <a:chOff x="0" y="0"/>
+          <a:chExt cx="0" cy="0"/>
+        </a:xfrm>
+      </p:grpSpPr>
+      <p:sp>
+        <p:nvSpPr>
+          <p:cNvPr id="2" name="Slide Image Placeholder 1"/>
+          <p:cNvSpPr>
+            <a:spLocks noGrp="1" noRot="1" noChangeAspect="1"/>
+          </p:cNvSpPr>
+          <p:nvPr>
+            <p:ph type="sldImg"/>
+          </p:nvPr>
+        </p:nvSpPr>
+        <p:spPr/>
+      </p:sp>
+      <p:sp>
+        <p:nvSpPr>
+          <p:cNvPr id="3" name="Notes Placeholder 2"/>
+          <p:cNvSpPr>
+            <a:spLocks noGrp="1"/>
+          </p:cNvSpPr>
+          <p:nvPr>
+            <p:ph type="body" idx="1"/>
+          </p:nvPr>
+        </p:nvSpPr>
+        <p:spPr/>
+        <p:txBody>
+          <a:bodyPr/>
+          <a:lstStyle/>
+          <a:p>
+            <a:endParaRPr lang="en-US"/>
+          </a:p>
+        </p:txBody>
+      </p:sp>
+      <p:sp>
+        <p:nvSpPr>
+          <p:cNvPr id="4" name="Slide Number Placeholder 3"/>
+          <p:cNvSpPr>
+            <a:spLocks noGrp="1"/>
+          </p:cNvSpPr>
+          <p:nvPr>
+            <p:ph type="sldNum" sz="quarter" idx="5"/>
+          </p:nvPr>
+        </p:nvSpPr>
+        <p:spPr/>
+        <p:txBody>
+          <a:bodyPr/>
+          <a:lstStyle/>
+          <a:p>
+            <a:fld id="{A04941E9-2A29-D24C-9FC1-C625B8635990}" type="slidenum">
+              <a:rPr lang="en-US" smtClean="0"/>
+              <a:t>24</a:t>
+            </a:fld>
+            <a:endParaRPr lang="en-US"/>
+          </a:p>
+        </p:txBody>
+      </p:sp>
+    </p:spTree>
+    <p:extLst>
+      <p:ext uri="{BB962C8B-B14F-4D97-AF65-F5344CB8AC3E}">
+        <p14:creationId xmlns:p14="http://schemas.microsoft.com/office/powerpoint/2010/main" val="3170388576"/>
+      </p:ext>
+    </p:extLst>
+  </p:cSld>
+  <p:clrMapOvr>
+    <a:masterClrMapping/>
+  </p:clrMapOvr>
+</p:notes>
+</file>
+
+<file path=ppt/notesSlides/notesSlide25.xml><?xml version="1.0" encoding="utf-8"?>
+<p:notes xmlns:a="http://schemas.openxmlformats.org/drawingml/2006/main" xmlns:r="http://schemas.openxmlformats.org/officeDocument/2006/relationships" xmlns:p="http://schemas.openxmlformats.org/presentationml/2006/main">
+  <p:cSld>
+    <p:spTree>
+      <p:nvGrpSpPr>
+        <p:cNvPr id="1" name=""/>
+        <p:cNvGrpSpPr/>
+        <p:nvPr/>
+      </p:nvGrpSpPr>
+      <p:grpSpPr>
+        <a:xfrm>
+          <a:off x="0" y="0"/>
+          <a:ext cx="0" cy="0"/>
+          <a:chOff x="0" y="0"/>
+          <a:chExt cx="0" cy="0"/>
+        </a:xfrm>
+      </p:grpSpPr>
+      <p:sp>
+        <p:nvSpPr>
+          <p:cNvPr id="2" name="Slide Image Placeholder 1"/>
+          <p:cNvSpPr>
+            <a:spLocks noGrp="1" noRot="1" noChangeAspect="1"/>
+          </p:cNvSpPr>
+          <p:nvPr>
+            <p:ph type="sldImg"/>
+          </p:nvPr>
+        </p:nvSpPr>
+        <p:spPr/>
+      </p:sp>
+      <p:sp>
+        <p:nvSpPr>
+          <p:cNvPr id="3" name="Notes Placeholder 2"/>
+          <p:cNvSpPr>
+            <a:spLocks noGrp="1"/>
+          </p:cNvSpPr>
+          <p:nvPr>
+            <p:ph type="body" idx="1"/>
+          </p:nvPr>
+        </p:nvSpPr>
+        <p:spPr/>
+        <p:txBody>
+          <a:bodyPr/>
+          <a:lstStyle/>
+          <a:p>
+            <a:endParaRPr lang="en-US"/>
+          </a:p>
+        </p:txBody>
+      </p:sp>
+      <p:sp>
+        <p:nvSpPr>
+          <p:cNvPr id="4" name="Slide Number Placeholder 3"/>
+          <p:cNvSpPr>
+            <a:spLocks noGrp="1"/>
+          </p:cNvSpPr>
+          <p:nvPr>
+            <p:ph type="sldNum" sz="quarter" idx="5"/>
+          </p:nvPr>
+        </p:nvSpPr>
+        <p:spPr/>
+        <p:txBody>
+          <a:bodyPr/>
+          <a:lstStyle/>
+          <a:p>
+            <a:fld id="{A04941E9-2A29-D24C-9FC1-C625B8635990}" type="slidenum">
+              <a:rPr lang="en-US" smtClean="0"/>
+              <a:t>25</a:t>
+            </a:fld>
+            <a:endParaRPr lang="en-US"/>
+          </a:p>
+        </p:txBody>
+      </p:sp>
+    </p:spTree>
+    <p:extLst>
+      <p:ext uri="{BB962C8B-B14F-4D97-AF65-F5344CB8AC3E}">
+        <p14:creationId xmlns:p14="http://schemas.microsoft.com/office/powerpoint/2010/main" val="3008985414"/>
+      </p:ext>
+    </p:extLst>
+  </p:cSld>
+  <p:clrMapOvr>
+    <a:masterClrMapping/>
+  </p:clrMapOvr>
+</p:notes>
+</file>
+
+<file path=ppt/notesSlides/notesSlide26.xml><?xml version="1.0" encoding="utf-8"?>
+<p:notes xmlns:a="http://schemas.openxmlformats.org/drawingml/2006/main" xmlns:r="http://schemas.openxmlformats.org/officeDocument/2006/relationships" xmlns:p="http://schemas.openxmlformats.org/presentationml/2006/main">
+  <p:cSld>
+    <p:spTree>
+      <p:nvGrpSpPr>
+        <p:cNvPr id="1" name=""/>
+        <p:cNvGrpSpPr/>
+        <p:nvPr/>
+      </p:nvGrpSpPr>
+      <p:grpSpPr>
+        <a:xfrm>
+          <a:off x="0" y="0"/>
+          <a:ext cx="0" cy="0"/>
+          <a:chOff x="0" y="0"/>
+          <a:chExt cx="0" cy="0"/>
+        </a:xfrm>
+      </p:grpSpPr>
+      <p:sp>
+        <p:nvSpPr>
+          <p:cNvPr id="2" name="Slide Image Placeholder 1"/>
+          <p:cNvSpPr>
+            <a:spLocks noGrp="1" noRot="1" noChangeAspect="1"/>
+          </p:cNvSpPr>
+          <p:nvPr>
+            <p:ph type="sldImg"/>
+          </p:nvPr>
+        </p:nvSpPr>
+        <p:spPr/>
+      </p:sp>
+      <p:sp>
+        <p:nvSpPr>
+          <p:cNvPr id="3" name="Notes Placeholder 2"/>
+          <p:cNvSpPr>
+            <a:spLocks noGrp="1"/>
+          </p:cNvSpPr>
+          <p:nvPr>
+            <p:ph type="body" idx="1"/>
+          </p:nvPr>
+        </p:nvSpPr>
+        <p:spPr/>
+        <p:txBody>
+          <a:bodyPr/>
+          <a:lstStyle/>
+          <a:p>
+            <a:endParaRPr lang="en-US"/>
+          </a:p>
+        </p:txBody>
+      </p:sp>
+      <p:sp>
+        <p:nvSpPr>
+          <p:cNvPr id="4" name="Slide Number Placeholder 3"/>
+          <p:cNvSpPr>
+            <a:spLocks noGrp="1"/>
+          </p:cNvSpPr>
+          <p:nvPr>
+            <p:ph type="sldNum" sz="quarter" idx="5"/>
+          </p:nvPr>
+        </p:nvSpPr>
+        <p:spPr/>
+        <p:txBody>
+          <a:bodyPr/>
+          <a:lstStyle/>
+          <a:p>
+            <a:fld id="{A04941E9-2A29-D24C-9FC1-C625B8635990}" type="slidenum">
+              <a:rPr lang="en-US" smtClean="0"/>
+              <a:t>26</a:t>
+            </a:fld>
+            <a:endParaRPr lang="en-US"/>
+          </a:p>
+        </p:txBody>
+      </p:sp>
+    </p:spTree>
+    <p:extLst>
+      <p:ext uri="{BB962C8B-B14F-4D97-AF65-F5344CB8AC3E}">
+        <p14:creationId xmlns:p14="http://schemas.microsoft.com/office/powerpoint/2010/main" val="3401503641"/>
+      </p:ext>
+    </p:extLst>
+  </p:cSld>
+  <p:clrMapOvr>
+    <a:masterClrMapping/>
+  </p:clrMapOvr>
+</p:notes>
+</file>
+
+<file path=ppt/notesSlides/notesSlide27.xml><?xml version="1.0" encoding="utf-8"?>
+<p:notes xmlns:a="http://schemas.openxmlformats.org/drawingml/2006/main" xmlns:r="http://schemas.openxmlformats.org/officeDocument/2006/relationships" xmlns:p="http://schemas.openxmlformats.org/presentationml/2006/main">
+  <p:cSld>
+    <p:spTree>
+      <p:nvGrpSpPr>
+        <p:cNvPr id="1" name=""/>
+        <p:cNvGrpSpPr/>
+        <p:nvPr/>
+      </p:nvGrpSpPr>
+      <p:grpSpPr>
+        <a:xfrm>
+          <a:off x="0" y="0"/>
+          <a:ext cx="0" cy="0"/>
+          <a:chOff x="0" y="0"/>
+          <a:chExt cx="0" cy="0"/>
+        </a:xfrm>
+      </p:grpSpPr>
+      <p:sp>
+        <p:nvSpPr>
+          <p:cNvPr id="2" name="Slide Image Placeholder 1"/>
+          <p:cNvSpPr>
+            <a:spLocks noGrp="1" noRot="1" noChangeAspect="1"/>
+          </p:cNvSpPr>
+          <p:nvPr>
+            <p:ph type="sldImg"/>
+          </p:nvPr>
+        </p:nvSpPr>
+        <p:spPr/>
+      </p:sp>
+      <p:sp>
+        <p:nvSpPr>
+          <p:cNvPr id="3" name="Notes Placeholder 2"/>
+          <p:cNvSpPr>
+            <a:spLocks noGrp="1"/>
+          </p:cNvSpPr>
+          <p:nvPr>
+            <p:ph type="body" idx="1"/>
+          </p:nvPr>
+        </p:nvSpPr>
+        <p:spPr/>
+        <p:txBody>
+          <a:bodyPr/>
+          <a:lstStyle/>
+          <a:p>
+            <a:endParaRPr lang="en-US"/>
+          </a:p>
+        </p:txBody>
+      </p:sp>
+      <p:sp>
+        <p:nvSpPr>
+          <p:cNvPr id="4" name="Slide Number Placeholder 3"/>
+          <p:cNvSpPr>
+            <a:spLocks noGrp="1"/>
+          </p:cNvSpPr>
+          <p:nvPr>
+            <p:ph type="sldNum" sz="quarter" idx="5"/>
+          </p:nvPr>
+        </p:nvSpPr>
+        <p:spPr/>
+        <p:txBody>
+          <a:bodyPr/>
+          <a:lstStyle/>
+          <a:p>
+            <a:fld id="{A04941E9-2A29-D24C-9FC1-C625B8635990}" type="slidenum">
+              <a:rPr lang="en-US" smtClean="0"/>
+              <a:t>27</a:t>
+            </a:fld>
+            <a:endParaRPr lang="en-US"/>
+          </a:p>
+        </p:txBody>
+      </p:sp>
+    </p:spTree>
+    <p:extLst>
+      <p:ext uri="{BB962C8B-B14F-4D97-AF65-F5344CB8AC3E}">
+        <p14:creationId xmlns:p14="http://schemas.microsoft.com/office/powerpoint/2010/main" val="3231216569"/>
+      </p:ext>
+    </p:extLst>
+  </p:cSld>
+  <p:clrMapOvr>
+    <a:masterClrMapping/>
+  </p:clrMapOvr>
+</p:notes>
+</file>
+
+<file path=ppt/notesSlides/notesSlide28.xml><?xml version="1.0" encoding="utf-8"?>
+<p:notes xmlns:a="http://schemas.openxmlformats.org/drawingml/2006/main" xmlns:r="http://schemas.openxmlformats.org/officeDocument/2006/relationships" xmlns:p="http://schemas.openxmlformats.org/presentationml/2006/main">
+  <p:cSld>
+    <p:spTree>
+      <p:nvGrpSpPr>
+        <p:cNvPr id="1" name=""/>
+        <p:cNvGrpSpPr/>
+        <p:nvPr/>
+      </p:nvGrpSpPr>
+      <p:grpSpPr>
+        <a:xfrm>
+          <a:off x="0" y="0"/>
+          <a:ext cx="0" cy="0"/>
+          <a:chOff x="0" y="0"/>
+          <a:chExt cx="0" cy="0"/>
+        </a:xfrm>
+      </p:grpSpPr>
+      <p:sp>
+        <p:nvSpPr>
+          <p:cNvPr id="2" name="Slide Image Placeholder 1"/>
+          <p:cNvSpPr>
+            <a:spLocks noGrp="1" noRot="1" noChangeAspect="1"/>
+          </p:cNvSpPr>
+          <p:nvPr>
+            <p:ph type="sldImg"/>
+          </p:nvPr>
+        </p:nvSpPr>
+        <p:spPr/>
+      </p:sp>
+      <p:sp>
+        <p:nvSpPr>
+          <p:cNvPr id="3" name="Notes Placeholder 2"/>
+          <p:cNvSpPr>
+            <a:spLocks noGrp="1"/>
+          </p:cNvSpPr>
+          <p:nvPr>
+            <p:ph type="body" idx="1"/>
+          </p:nvPr>
+        </p:nvSpPr>
+        <p:spPr/>
+        <p:txBody>
+          <a:bodyPr/>
+          <a:lstStyle/>
+          <a:p>
+            <a:endParaRPr lang="en-US"/>
+          </a:p>
+        </p:txBody>
+      </p:sp>
+      <p:sp>
+        <p:nvSpPr>
+          <p:cNvPr id="4" name="Slide Number Placeholder 3"/>
+          <p:cNvSpPr>
+            <a:spLocks noGrp="1"/>
+          </p:cNvSpPr>
+          <p:nvPr>
+            <p:ph type="sldNum" sz="quarter" idx="5"/>
+          </p:nvPr>
+        </p:nvSpPr>
+        <p:spPr/>
+        <p:txBody>
+          <a:bodyPr/>
+          <a:lstStyle/>
+          <a:p>
+            <a:fld id="{A04941E9-2A29-D24C-9FC1-C625B8635990}" type="slidenum">
+              <a:rPr lang="en-US" smtClean="0"/>
+              <a:t>28</a:t>
+            </a:fld>
+            <a:endParaRPr lang="en-US"/>
+          </a:p>
+        </p:txBody>
+      </p:sp>
+    </p:spTree>
+    <p:extLst>
+      <p:ext uri="{BB962C8B-B14F-4D97-AF65-F5344CB8AC3E}">
+        <p14:creationId xmlns:p14="http://schemas.microsoft.com/office/powerpoint/2010/main" val="3092557680"/>
+      </p:ext>
+    </p:extLst>
+  </p:cSld>
+  <p:clrMapOvr>
+    <a:masterClrMapping/>
+  </p:clrMapOvr>
+</p:notes>
+</file>
+
+<file path=ppt/notesSlides/notesSlide29.xml><?xml version="1.0" encoding="utf-8"?>
+<p:notes xmlns:a="http://schemas.openxmlformats.org/drawingml/2006/main" xmlns:r="http://schemas.openxmlformats.org/officeDocument/2006/relationships" xmlns:p="http://schemas.openxmlformats.org/presentationml/2006/main">
+  <p:cSld>
+    <p:spTree>
+      <p:nvGrpSpPr>
+        <p:cNvPr id="1" name=""/>
+        <p:cNvGrpSpPr/>
+        <p:nvPr/>
+      </p:nvGrpSpPr>
+      <p:grpSpPr>
+        <a:xfrm>
+          <a:off x="0" y="0"/>
+          <a:ext cx="0" cy="0"/>
+          <a:chOff x="0" y="0"/>
+          <a:chExt cx="0" cy="0"/>
+        </a:xfrm>
+      </p:grpSpPr>
+      <p:sp>
+        <p:nvSpPr>
+          <p:cNvPr id="2" name="Slide Image Placeholder 1"/>
+          <p:cNvSpPr>
+            <a:spLocks noGrp="1" noRot="1" noChangeAspect="1"/>
+          </p:cNvSpPr>
+          <p:nvPr>
+            <p:ph type="sldImg"/>
+          </p:nvPr>
+        </p:nvSpPr>
+        <p:spPr/>
+      </p:sp>
+      <p:sp>
+        <p:nvSpPr>
+          <p:cNvPr id="3" name="Notes Placeholder 2"/>
+          <p:cNvSpPr>
+            <a:spLocks noGrp="1"/>
+          </p:cNvSpPr>
+          <p:nvPr>
+            <p:ph type="body" idx="1"/>
+          </p:nvPr>
+        </p:nvSpPr>
+        <p:spPr/>
+        <p:txBody>
+          <a:bodyPr/>
+          <a:lstStyle/>
+          <a:p>
+            <a:endParaRPr lang="en-US"/>
+          </a:p>
+        </p:txBody>
+      </p:sp>
+      <p:sp>
+        <p:nvSpPr>
+          <p:cNvPr id="4" name="Slide Number Placeholder 3"/>
+          <p:cNvSpPr>
+            <a:spLocks noGrp="1"/>
+          </p:cNvSpPr>
+          <p:nvPr>
+            <p:ph type="sldNum" sz="quarter" idx="5"/>
+          </p:nvPr>
+        </p:nvSpPr>
+        <p:spPr/>
+        <p:txBody>
+          <a:bodyPr/>
+          <a:lstStyle/>
+          <a:p>
+            <a:fld id="{A04941E9-2A29-D24C-9FC1-C625B8635990}" type="slidenum">
+              <a:rPr lang="en-US" smtClean="0"/>
+              <a:t>29</a:t>
+            </a:fld>
+            <a:endParaRPr lang="en-US"/>
+          </a:p>
+        </p:txBody>
+      </p:sp>
+    </p:spTree>
+    <p:extLst>
+      <p:ext uri="{BB962C8B-B14F-4D97-AF65-F5344CB8AC3E}">
+        <p14:creationId xmlns:p14="http://schemas.microsoft.com/office/powerpoint/2010/main" val="2070274652"/>
+      </p:ext>
+    </p:extLst>
+  </p:cSld>
+  <p:clrMapOvr>
+    <a:masterClrMapping/>
+  </p:clrMapOvr>
+</p:notes>
+</file>
+
+<file path=ppt/notesSlides/notesSlide3.xml><?xml version="1.0" encoding="utf-8"?>
+<p:notes xmlns:a="http://schemas.openxmlformats.org/drawingml/2006/main" xmlns:r="http://schemas.openxmlformats.org/officeDocument/2006/relationships" xmlns:p="http://schemas.openxmlformats.org/presentationml/2006/main">
+  <p:cSld>
+    <p:spTree>
+      <p:nvGrpSpPr>
+        <p:cNvPr id="1" name=""/>
+        <p:cNvGrpSpPr/>
+        <p:nvPr/>
+      </p:nvGrpSpPr>
+      <p:grpSpPr>
+        <a:xfrm>
+          <a:off x="0" y="0"/>
+          <a:ext cx="0" cy="0"/>
+          <a:chOff x="0" y="0"/>
+          <a:chExt cx="0" cy="0"/>
+        </a:xfrm>
+      </p:grpSpPr>
+      <p:sp>
+        <p:nvSpPr>
+          <p:cNvPr id="2" name="Slide Image Placeholder 1"/>
+          <p:cNvSpPr>
+            <a:spLocks noGrp="1" noRot="1" noChangeAspect="1"/>
+          </p:cNvSpPr>
+          <p:nvPr>
+            <p:ph type="sldImg"/>
+          </p:nvPr>
+        </p:nvSpPr>
+        <p:spPr/>
+      </p:sp>
+      <p:sp>
+        <p:nvSpPr>
+          <p:cNvPr id="3" name="Notes Placeholder 2"/>
+          <p:cNvSpPr>
+            <a:spLocks noGrp="1"/>
+          </p:cNvSpPr>
+          <p:nvPr>
+            <p:ph type="body" idx="1"/>
+          </p:nvPr>
+        </p:nvSpPr>
+        <p:spPr/>
+        <p:txBody>
+          <a:bodyPr/>
+          <a:lstStyle/>
+          <a:p>
+            <a:endParaRPr lang="en-US"/>
+          </a:p>
+        </p:txBody>
+      </p:sp>
+      <p:sp>
+        <p:nvSpPr>
+          <p:cNvPr id="4" name="Slide Number Placeholder 3"/>
+          <p:cNvSpPr>
+            <a:spLocks noGrp="1"/>
+          </p:cNvSpPr>
+          <p:nvPr>
+            <p:ph type="sldNum" sz="quarter" idx="5"/>
+          </p:nvPr>
+        </p:nvSpPr>
+        <p:spPr/>
+        <p:txBody>
+          <a:bodyPr/>
+          <a:lstStyle/>
+          <a:p>
+            <a:fld id="{A04941E9-2A29-D24C-9FC1-C625B8635990}" type="slidenum">
+              <a:rPr lang="en-US" smtClean="0"/>
+              <a:t>3</a:t>
+            </a:fld>
+            <a:endParaRPr lang="en-US"/>
+          </a:p>
+        </p:txBody>
+      </p:sp>
+    </p:spTree>
+    <p:extLst>
+      <p:ext uri="{BB962C8B-B14F-4D97-AF65-F5344CB8AC3E}">
+        <p14:creationId xmlns:p14="http://schemas.microsoft.com/office/powerpoint/2010/main" val="117880216"/>
+      </p:ext>
+    </p:extLst>
+  </p:cSld>
+  <p:clrMapOvr>
+    <a:masterClrMapping/>
+  </p:clrMapOvr>
+</p:notes>
+</file>
+
+<file path=ppt/notesSlides/notesSlide30.xml><?xml version="1.0" encoding="utf-8"?>
+<p:notes xmlns:a="http://schemas.openxmlformats.org/drawingml/2006/main" xmlns:r="http://schemas.openxmlformats.org/officeDocument/2006/relationships" xmlns:p="http://schemas.openxmlformats.org/presentationml/2006/main">
+  <p:cSld>
+    <p:spTree>
+      <p:nvGrpSpPr>
+        <p:cNvPr id="1" name=""/>
+        <p:cNvGrpSpPr/>
+        <p:nvPr/>
+      </p:nvGrpSpPr>
+      <p:grpSpPr>
+        <a:xfrm>
+          <a:off x="0" y="0"/>
+          <a:ext cx="0" cy="0"/>
+          <a:chOff x="0" y="0"/>
+          <a:chExt cx="0" cy="0"/>
+        </a:xfrm>
+      </p:grpSpPr>
+      <p:sp>
+        <p:nvSpPr>
+          <p:cNvPr id="2" name="Slide Image Placeholder 1"/>
+          <p:cNvSpPr>
+            <a:spLocks noGrp="1" noRot="1" noChangeAspect="1"/>
+          </p:cNvSpPr>
+          <p:nvPr>
+            <p:ph type="sldImg"/>
+          </p:nvPr>
+        </p:nvSpPr>
+        <p:spPr/>
+      </p:sp>
+      <p:sp>
+        <p:nvSpPr>
+          <p:cNvPr id="3" name="Notes Placeholder 2"/>
+          <p:cNvSpPr>
+            <a:spLocks noGrp="1"/>
+          </p:cNvSpPr>
+          <p:nvPr>
+            <p:ph type="body" idx="1"/>
+          </p:nvPr>
+        </p:nvSpPr>
+        <p:spPr/>
+        <p:txBody>
+          <a:bodyPr/>
+          <a:lstStyle/>
+          <a:p>
+            <a:endParaRPr lang="en-US"/>
+          </a:p>
+        </p:txBody>
+      </p:sp>
+      <p:sp>
+        <p:nvSpPr>
+          <p:cNvPr id="4" name="Slide Number Placeholder 3"/>
+          <p:cNvSpPr>
+            <a:spLocks noGrp="1"/>
+          </p:cNvSpPr>
+          <p:nvPr>
+            <p:ph type="sldNum" sz="quarter" idx="5"/>
+          </p:nvPr>
+        </p:nvSpPr>
+        <p:spPr/>
+        <p:txBody>
+          <a:bodyPr/>
+          <a:lstStyle/>
+          <a:p>
+            <a:fld id="{A04941E9-2A29-D24C-9FC1-C625B8635990}" type="slidenum">
+              <a:rPr lang="en-US" smtClean="0"/>
+              <a:t>30</a:t>
+            </a:fld>
+            <a:endParaRPr lang="en-US"/>
+          </a:p>
+        </p:txBody>
+      </p:sp>
+    </p:spTree>
+    <p:extLst>
+      <p:ext uri="{BB962C8B-B14F-4D97-AF65-F5344CB8AC3E}">
+        <p14:creationId xmlns:p14="http://schemas.microsoft.com/office/powerpoint/2010/main" val="2214405029"/>
+      </p:ext>
+    </p:extLst>
+  </p:cSld>
+  <p:clrMapOvr>
+    <a:masterClrMapping/>
+  </p:clrMapOvr>
+</p:notes>
+</file>
+
+<file path=ppt/notesSlides/notesSlide31.xml><?xml version="1.0" encoding="utf-8"?>
+<p:notes xmlns:a="http://schemas.openxmlformats.org/drawingml/2006/main" xmlns:r="http://schemas.openxmlformats.org/officeDocument/2006/relationships" xmlns:p="http://schemas.openxmlformats.org/presentationml/2006/main">
+  <p:cSld>
+    <p:spTree>
+      <p:nvGrpSpPr>
+        <p:cNvPr id="1" name=""/>
+        <p:cNvGrpSpPr/>
+        <p:nvPr/>
+      </p:nvGrpSpPr>
+      <p:grpSpPr>
+        <a:xfrm>
+          <a:off x="0" y="0"/>
+          <a:ext cx="0" cy="0"/>
+          <a:chOff x="0" y="0"/>
+          <a:chExt cx="0" cy="0"/>
+        </a:xfrm>
+      </p:grpSpPr>
+      <p:sp>
+        <p:nvSpPr>
+          <p:cNvPr id="2" name="Slide Image Placeholder 1"/>
+          <p:cNvSpPr>
+            <a:spLocks noGrp="1" noRot="1" noChangeAspect="1"/>
+          </p:cNvSpPr>
+          <p:nvPr>
+            <p:ph type="sldImg"/>
+          </p:nvPr>
+        </p:nvSpPr>
+        <p:spPr/>
+      </p:sp>
+      <p:sp>
+        <p:nvSpPr>
+          <p:cNvPr id="3" name="Notes Placeholder 2"/>
+          <p:cNvSpPr>
+            <a:spLocks noGrp="1"/>
+          </p:cNvSpPr>
+          <p:nvPr>
+            <p:ph type="body" idx="1"/>
+          </p:nvPr>
+        </p:nvSpPr>
+        <p:spPr/>
+        <p:txBody>
+          <a:bodyPr/>
+          <a:lstStyle/>
+          <a:p>
+            <a:endParaRPr lang="en-US"/>
+          </a:p>
+        </p:txBody>
+      </p:sp>
+      <p:sp>
+        <p:nvSpPr>
+          <p:cNvPr id="4" name="Slide Number Placeholder 3"/>
+          <p:cNvSpPr>
+            <a:spLocks noGrp="1"/>
+          </p:cNvSpPr>
+          <p:nvPr>
+            <p:ph type="sldNum" sz="quarter" idx="5"/>
+          </p:nvPr>
+        </p:nvSpPr>
+        <p:spPr/>
+        <p:txBody>
+          <a:bodyPr/>
+          <a:lstStyle/>
+          <a:p>
+            <a:fld id="{A04941E9-2A29-D24C-9FC1-C625B8635990}" type="slidenum">
+              <a:rPr lang="en-US" smtClean="0"/>
+              <a:t>31</a:t>
+            </a:fld>
+            <a:endParaRPr lang="en-US"/>
+          </a:p>
+        </p:txBody>
+      </p:sp>
+    </p:spTree>
+    <p:extLst>
+      <p:ext uri="{BB962C8B-B14F-4D97-AF65-F5344CB8AC3E}">
+        <p14:creationId xmlns:p14="http://schemas.microsoft.com/office/powerpoint/2010/main" val="2989890821"/>
+      </p:ext>
+    </p:extLst>
+  </p:cSld>
+  <p:clrMapOvr>
+    <a:masterClrMapping/>
+  </p:clrMapOvr>
+</p:notes>
+</file>
+
+<file path=ppt/notesSlides/notesSlide32.xml><?xml version="1.0" encoding="utf-8"?>
+<p:notes xmlns:a="http://schemas.openxmlformats.org/drawingml/2006/main" xmlns:r="http://schemas.openxmlformats.org/officeDocument/2006/relationships" xmlns:p="http://schemas.openxmlformats.org/presentationml/2006/main">
+  <p:cSld>
+    <p:spTree>
+      <p:nvGrpSpPr>
+        <p:cNvPr id="1" name=""/>
+        <p:cNvGrpSpPr/>
+        <p:nvPr/>
+      </p:nvGrpSpPr>
+      <p:grpSpPr>
+        <a:xfrm>
+          <a:off x="0" y="0"/>
+          <a:ext cx="0" cy="0"/>
+          <a:chOff x="0" y="0"/>
+          <a:chExt cx="0" cy="0"/>
+        </a:xfrm>
+      </p:grpSpPr>
+      <p:sp>
+        <p:nvSpPr>
+          <p:cNvPr id="2" name="Slide Image Placeholder 1"/>
+          <p:cNvSpPr>
+            <a:spLocks noGrp="1" noRot="1" noChangeAspect="1"/>
+          </p:cNvSpPr>
+          <p:nvPr>
+            <p:ph type="sldImg"/>
+          </p:nvPr>
+        </p:nvSpPr>
+        <p:spPr/>
+      </p:sp>
+      <p:sp>
+        <p:nvSpPr>
+          <p:cNvPr id="3" name="Notes Placeholder 2"/>
+          <p:cNvSpPr>
+            <a:spLocks noGrp="1"/>
+          </p:cNvSpPr>
+          <p:nvPr>
+            <p:ph type="body" idx="1"/>
+          </p:nvPr>
+        </p:nvSpPr>
+        <p:spPr/>
+        <p:txBody>
+          <a:bodyPr/>
+          <a:lstStyle/>
+          <a:p>
+            <a:endParaRPr lang="en-US"/>
+          </a:p>
+        </p:txBody>
+      </p:sp>
+      <p:sp>
+        <p:nvSpPr>
+          <p:cNvPr id="4" name="Slide Number Placeholder 3"/>
+          <p:cNvSpPr>
+            <a:spLocks noGrp="1"/>
+          </p:cNvSpPr>
+          <p:nvPr>
+            <p:ph type="sldNum" sz="quarter" idx="5"/>
+          </p:nvPr>
+        </p:nvSpPr>
+        <p:spPr/>
+        <p:txBody>
+          <a:bodyPr/>
+          <a:lstStyle/>
+          <a:p>
+            <a:fld id="{A04941E9-2A29-D24C-9FC1-C625B8635990}" type="slidenum">
+              <a:rPr lang="en-US" smtClean="0"/>
+              <a:t>32</a:t>
+            </a:fld>
+            <a:endParaRPr lang="en-US"/>
+          </a:p>
+        </p:txBody>
+      </p:sp>
+    </p:spTree>
+    <p:extLst>
+      <p:ext uri="{BB962C8B-B14F-4D97-AF65-F5344CB8AC3E}">
+        <p14:creationId xmlns:p14="http://schemas.microsoft.com/office/powerpoint/2010/main" val="4171748871"/>
+      </p:ext>
+    </p:extLst>
+  </p:cSld>
+  <p:clrMapOvr>
+    <a:masterClrMapping/>
+  </p:clrMapOvr>
+</p:notes>
+</file>
+
+<file path=ppt/notesSlides/notesSlide33.xml><?xml version="1.0" encoding="utf-8"?>
+<p:notes xmlns:a="http://schemas.openxmlformats.org/drawingml/2006/main" xmlns:r="http://schemas.openxmlformats.org/officeDocument/2006/relationships" xmlns:p="http://schemas.openxmlformats.org/presentationml/2006/main">
+  <p:cSld>
+    <p:spTree>
+      <p:nvGrpSpPr>
+        <p:cNvPr id="1" name=""/>
+        <p:cNvGrpSpPr/>
+        <p:nvPr/>
+      </p:nvGrpSpPr>
+      <p:grpSpPr>
+        <a:xfrm>
+          <a:off x="0" y="0"/>
+          <a:ext cx="0" cy="0"/>
+          <a:chOff x="0" y="0"/>
+          <a:chExt cx="0" cy="0"/>
+        </a:xfrm>
+      </p:grpSpPr>
+      <p:sp>
+        <p:nvSpPr>
+          <p:cNvPr id="2" name="Slide Image Placeholder 1"/>
+          <p:cNvSpPr>
+            <a:spLocks noGrp="1" noRot="1" noChangeAspect="1"/>
+          </p:cNvSpPr>
+          <p:nvPr>
+            <p:ph type="sldImg"/>
+          </p:nvPr>
+        </p:nvSpPr>
+        <p:spPr/>
+      </p:sp>
+      <p:sp>
+        <p:nvSpPr>
+          <p:cNvPr id="3" name="Notes Placeholder 2"/>
+          <p:cNvSpPr>
+            <a:spLocks noGrp="1"/>
+          </p:cNvSpPr>
+          <p:nvPr>
+            <p:ph type="body" idx="1"/>
+          </p:nvPr>
+        </p:nvSpPr>
+        <p:spPr/>
+        <p:txBody>
+          <a:bodyPr/>
+          <a:lstStyle/>
+          <a:p>
+            <a:endParaRPr lang="en-US"/>
+          </a:p>
+        </p:txBody>
+      </p:sp>
+      <p:sp>
+        <p:nvSpPr>
+          <p:cNvPr id="4" name="Slide Number Placeholder 3"/>
+          <p:cNvSpPr>
+            <a:spLocks noGrp="1"/>
+          </p:cNvSpPr>
+          <p:nvPr>
+            <p:ph type="sldNum" sz="quarter" idx="5"/>
+          </p:nvPr>
+        </p:nvSpPr>
+        <p:spPr/>
+        <p:txBody>
+          <a:bodyPr/>
+          <a:lstStyle/>
+          <a:p>
+            <a:fld id="{A04941E9-2A29-D24C-9FC1-C625B8635990}" type="slidenum">
+              <a:rPr lang="en-US" smtClean="0"/>
+              <a:t>33</a:t>
+            </a:fld>
+            <a:endParaRPr lang="en-US"/>
+          </a:p>
+        </p:txBody>
+      </p:sp>
+    </p:spTree>
+    <p:extLst>
+      <p:ext uri="{BB962C8B-B14F-4D97-AF65-F5344CB8AC3E}">
+        <p14:creationId xmlns:p14="http://schemas.microsoft.com/office/powerpoint/2010/main" val="1881753940"/>
+      </p:ext>
+    </p:extLst>
+  </p:cSld>
+  <p:clrMapOvr>
+    <a:masterClrMapping/>
+  </p:clrMapOvr>
+</p:notes>
+</file>
+
+<file path=ppt/notesSlides/notesSlide34.xml><?xml version="1.0" encoding="utf-8"?>
+<p:notes xmlns:a="http://schemas.openxmlformats.org/drawingml/2006/main" xmlns:r="http://schemas.openxmlformats.org/officeDocument/2006/relationships" xmlns:p="http://schemas.openxmlformats.org/presentationml/2006/main">
+  <p:cSld>
+    <p:spTree>
+      <p:nvGrpSpPr>
+        <p:cNvPr id="1" name=""/>
+        <p:cNvGrpSpPr/>
+        <p:nvPr/>
+      </p:nvGrpSpPr>
+      <p:grpSpPr>
+        <a:xfrm>
+          <a:off x="0" y="0"/>
+          <a:ext cx="0" cy="0"/>
+          <a:chOff x="0" y="0"/>
+          <a:chExt cx="0" cy="0"/>
+        </a:xfrm>
+      </p:grpSpPr>
+      <p:sp>
+        <p:nvSpPr>
+          <p:cNvPr id="2" name="Slide Image Placeholder 1"/>
+          <p:cNvSpPr>
+            <a:spLocks noGrp="1" noRot="1" noChangeAspect="1"/>
+          </p:cNvSpPr>
+          <p:nvPr>
+            <p:ph type="sldImg"/>
+          </p:nvPr>
+        </p:nvSpPr>
+        <p:spPr/>
+      </p:sp>
+      <p:sp>
+        <p:nvSpPr>
+          <p:cNvPr id="3" name="Notes Placeholder 2"/>
+          <p:cNvSpPr>
+            <a:spLocks noGrp="1"/>
+          </p:cNvSpPr>
+          <p:nvPr>
+            <p:ph type="body" idx="1"/>
+          </p:nvPr>
+        </p:nvSpPr>
+        <p:spPr/>
+        <p:txBody>
+          <a:bodyPr/>
+          <a:lstStyle/>
+          <a:p>
+            <a:endParaRPr lang="en-US"/>
+          </a:p>
+        </p:txBody>
+      </p:sp>
+      <p:sp>
+        <p:nvSpPr>
+          <p:cNvPr id="4" name="Slide Number Placeholder 3"/>
+          <p:cNvSpPr>
+            <a:spLocks noGrp="1"/>
+          </p:cNvSpPr>
+          <p:nvPr>
+            <p:ph type="sldNum" sz="quarter" idx="5"/>
+          </p:nvPr>
+        </p:nvSpPr>
+        <p:spPr/>
+        <p:txBody>
+          <a:bodyPr/>
+          <a:lstStyle/>
+          <a:p>
+            <a:fld id="{A04941E9-2A29-D24C-9FC1-C625B8635990}" type="slidenum">
+              <a:rPr lang="en-US" smtClean="0"/>
+              <a:t>34</a:t>
+            </a:fld>
+            <a:endParaRPr lang="en-US"/>
+          </a:p>
+        </p:txBody>
+      </p:sp>
+    </p:spTree>
+    <p:extLst>
+      <p:ext uri="{BB962C8B-B14F-4D97-AF65-F5344CB8AC3E}">
+        <p14:creationId xmlns:p14="http://schemas.microsoft.com/office/powerpoint/2010/main" val="1517215107"/>
+      </p:ext>
+    </p:extLst>
+  </p:cSld>
+  <p:clrMapOvr>
+    <a:masterClrMapping/>
+  </p:clrMapOvr>
+</p:notes>
+</file>
+
+<file path=ppt/notesSlides/notesSlide4.xml><?xml version="1.0" encoding="utf-8"?>
+<p:notes xmlns:a="http://schemas.openxmlformats.org/drawingml/2006/main" xmlns:r="http://schemas.openxmlformats.org/officeDocument/2006/relationships" xmlns:p="http://schemas.openxmlformats.org/presentationml/2006/main">
+  <p:cSld>
+    <p:spTree>
+      <p:nvGrpSpPr>
+        <p:cNvPr id="1" name=""/>
+        <p:cNvGrpSpPr/>
+        <p:nvPr/>
+      </p:nvGrpSpPr>
+      <p:grpSpPr>
+        <a:xfrm>
+          <a:off x="0" y="0"/>
+          <a:ext cx="0" cy="0"/>
+          <a:chOff x="0" y="0"/>
+          <a:chExt cx="0" cy="0"/>
+        </a:xfrm>
+      </p:grpSpPr>
+      <p:sp>
+        <p:nvSpPr>
+          <p:cNvPr id="2" name="Slide Image Placeholder 1"/>
+          <p:cNvSpPr>
+            <a:spLocks noGrp="1" noRot="1" noChangeAspect="1"/>
+          </p:cNvSpPr>
+          <p:nvPr>
+            <p:ph type="sldImg"/>
+          </p:nvPr>
+        </p:nvSpPr>
+        <p:spPr/>
+      </p:sp>
+      <p:sp>
+        <p:nvSpPr>
+          <p:cNvPr id="3" name="Notes Placeholder 2"/>
+          <p:cNvSpPr>
+            <a:spLocks noGrp="1"/>
+          </p:cNvSpPr>
+          <p:nvPr>
+            <p:ph type="body" idx="1"/>
+          </p:nvPr>
+        </p:nvSpPr>
+        <p:spPr/>
+        <p:txBody>
+          <a:bodyPr/>
+          <a:lstStyle/>
+          <a:p>
+            <a:endParaRPr lang="en-US"/>
+          </a:p>
+        </p:txBody>
+      </p:sp>
+      <p:sp>
+        <p:nvSpPr>
+          <p:cNvPr id="4" name="Slide Number Placeholder 3"/>
+          <p:cNvSpPr>
+            <a:spLocks noGrp="1"/>
+          </p:cNvSpPr>
+          <p:nvPr>
+            <p:ph type="sldNum" sz="quarter" idx="5"/>
+          </p:nvPr>
+        </p:nvSpPr>
+        <p:spPr/>
+        <p:txBody>
+          <a:bodyPr/>
+          <a:lstStyle/>
+          <a:p>
+            <a:fld id="{A04941E9-2A29-D24C-9FC1-C625B8635990}" type="slidenum">
+              <a:rPr lang="en-US" smtClean="0"/>
+              <a:t>4</a:t>
+            </a:fld>
+            <a:endParaRPr lang="en-US"/>
+          </a:p>
+        </p:txBody>
+      </p:sp>
+    </p:spTree>
+    <p:extLst>
+      <p:ext uri="{BB962C8B-B14F-4D97-AF65-F5344CB8AC3E}">
+        <p14:creationId xmlns:p14="http://schemas.microsoft.com/office/powerpoint/2010/main" val="3011562541"/>
+      </p:ext>
+    </p:extLst>
+  </p:cSld>
+  <p:clrMapOvr>
+    <a:masterClrMapping/>
+  </p:clrMapOvr>
+</p:notes>
+</file>
+
+<file path=ppt/notesSlides/notesSlide5.xml><?xml version="1.0" encoding="utf-8"?>
+<p:notes xmlns:a="http://schemas.openxmlformats.org/drawingml/2006/main" xmlns:r="http://schemas.openxmlformats.org/officeDocument/2006/relationships" xmlns:p="http://schemas.openxmlformats.org/presentationml/2006/main">
+  <p:cSld>
+    <p:spTree>
+      <p:nvGrpSpPr>
+        <p:cNvPr id="1" name=""/>
+        <p:cNvGrpSpPr/>
+        <p:nvPr/>
+      </p:nvGrpSpPr>
+      <p:grpSpPr>
+        <a:xfrm>
+          <a:off x="0" y="0"/>
+          <a:ext cx="0" cy="0"/>
+          <a:chOff x="0" y="0"/>
+          <a:chExt cx="0" cy="0"/>
+        </a:xfrm>
+      </p:grpSpPr>
+      <p:sp>
+        <p:nvSpPr>
+          <p:cNvPr id="2" name="Slide Image Placeholder 1"/>
+          <p:cNvSpPr>
+            <a:spLocks noGrp="1" noRot="1" noChangeAspect="1"/>
+          </p:cNvSpPr>
+          <p:nvPr>
+            <p:ph type="sldImg"/>
+          </p:nvPr>
+        </p:nvSpPr>
+        <p:spPr/>
+      </p:sp>
+      <p:sp>
+        <p:nvSpPr>
+          <p:cNvPr id="3" name="Notes Placeholder 2"/>
+          <p:cNvSpPr>
+            <a:spLocks noGrp="1"/>
+          </p:cNvSpPr>
+          <p:nvPr>
+            <p:ph type="body" idx="1"/>
+          </p:nvPr>
+        </p:nvSpPr>
+        <p:spPr/>
+        <p:txBody>
+          <a:bodyPr/>
+          <a:lstStyle/>
+          <a:p>
+            <a:endParaRPr lang="en-US"/>
+          </a:p>
+        </p:txBody>
+      </p:sp>
+      <p:sp>
+        <p:nvSpPr>
+          <p:cNvPr id="4" name="Slide Number Placeholder 3"/>
+          <p:cNvSpPr>
+            <a:spLocks noGrp="1"/>
+          </p:cNvSpPr>
+          <p:nvPr>
+            <p:ph type="sldNum" sz="quarter" idx="5"/>
+          </p:nvPr>
+        </p:nvSpPr>
+        <p:spPr/>
+        <p:txBody>
+          <a:bodyPr/>
+          <a:lstStyle/>
+          <a:p>
+            <a:fld id="{A04941E9-2A29-D24C-9FC1-C625B8635990}" type="slidenum">
+              <a:rPr lang="en-US" smtClean="0"/>
+              <a:t>5</a:t>
+            </a:fld>
+            <a:endParaRPr lang="en-US"/>
+          </a:p>
+        </p:txBody>
+      </p:sp>
+    </p:spTree>
+    <p:extLst>
+      <p:ext uri="{BB962C8B-B14F-4D97-AF65-F5344CB8AC3E}">
+        <p14:creationId xmlns:p14="http://schemas.microsoft.com/office/powerpoint/2010/main" val="1677654904"/>
+      </p:ext>
+    </p:extLst>
+  </p:cSld>
+  <p:clrMapOvr>
+    <a:masterClrMapping/>
+  </p:clrMapOvr>
+</p:notes>
+</file>
+
+<file path=ppt/notesSlides/notesSlide6.xml><?xml version="1.0" encoding="utf-8"?>
+<p:notes xmlns:a="http://schemas.openxmlformats.org/drawingml/2006/main" xmlns:r="http://schemas.openxmlformats.org/officeDocument/2006/relationships" xmlns:p="http://schemas.openxmlformats.org/presentationml/2006/main">
+  <p:cSld>
+    <p:spTree>
+      <p:nvGrpSpPr>
+        <p:cNvPr id="1" name=""/>
+        <p:cNvGrpSpPr/>
+        <p:nvPr/>
+      </p:nvGrpSpPr>
+      <p:grpSpPr>
+        <a:xfrm>
+          <a:off x="0" y="0"/>
+          <a:ext cx="0" cy="0"/>
+          <a:chOff x="0" y="0"/>
+          <a:chExt cx="0" cy="0"/>
+        </a:xfrm>
+      </p:grpSpPr>
+      <p:sp>
+        <p:nvSpPr>
+          <p:cNvPr id="2" name="Slide Image Placeholder 1"/>
+          <p:cNvSpPr>
+            <a:spLocks noGrp="1" noRot="1" noChangeAspect="1"/>
+          </p:cNvSpPr>
+          <p:nvPr>
+            <p:ph type="sldImg"/>
+          </p:nvPr>
+        </p:nvSpPr>
+        <p:spPr/>
+      </p:sp>
+      <p:sp>
+        <p:nvSpPr>
+          <p:cNvPr id="3" name="Notes Placeholder 2"/>
+          <p:cNvSpPr>
+            <a:spLocks noGrp="1"/>
+          </p:cNvSpPr>
+          <p:nvPr>
+            <p:ph type="body" idx="1"/>
+          </p:nvPr>
+        </p:nvSpPr>
+        <p:spPr/>
+        <p:txBody>
+          <a:bodyPr/>
+          <a:lstStyle/>
+          <a:p>
+            <a:endParaRPr lang="en-US"/>
+          </a:p>
+        </p:txBody>
+      </p:sp>
+      <p:sp>
+        <p:nvSpPr>
+          <p:cNvPr id="4" name="Slide Number Placeholder 3"/>
+          <p:cNvSpPr>
+            <a:spLocks noGrp="1"/>
+          </p:cNvSpPr>
+          <p:nvPr>
+            <p:ph type="sldNum" sz="quarter" idx="5"/>
+          </p:nvPr>
+        </p:nvSpPr>
+        <p:spPr/>
+        <p:txBody>
+          <a:bodyPr/>
+          <a:lstStyle/>
+          <a:p>
+            <a:fld id="{A04941E9-2A29-D24C-9FC1-C625B8635990}" type="slidenum">
+              <a:rPr lang="en-US" smtClean="0"/>
+              <a:t>6</a:t>
+            </a:fld>
+            <a:endParaRPr lang="en-US"/>
+          </a:p>
+        </p:txBody>
+      </p:sp>
+    </p:spTree>
+    <p:extLst>
+      <p:ext uri="{BB962C8B-B14F-4D97-AF65-F5344CB8AC3E}">
+        <p14:creationId xmlns:p14="http://schemas.microsoft.com/office/powerpoint/2010/main" val="2347298444"/>
+      </p:ext>
+    </p:extLst>
+  </p:cSld>
+  <p:clrMapOvr>
+    <a:masterClrMapping/>
+  </p:clrMapOvr>
+</p:notes>
+</file>
+
+<file path=ppt/notesSlides/notesSlide7.xml><?xml version="1.0" encoding="utf-8"?>
+<p:notes xmlns:a="http://schemas.openxmlformats.org/drawingml/2006/main" xmlns:r="http://schemas.openxmlformats.org/officeDocument/2006/relationships" xmlns:p="http://schemas.openxmlformats.org/presentationml/2006/main">
+  <p:cSld>
+    <p:spTree>
+      <p:nvGrpSpPr>
+        <p:cNvPr id="1" name=""/>
+        <p:cNvGrpSpPr/>
+        <p:nvPr/>
+      </p:nvGrpSpPr>
+      <p:grpSpPr>
+        <a:xfrm>
+          <a:off x="0" y="0"/>
+          <a:ext cx="0" cy="0"/>
+          <a:chOff x="0" y="0"/>
+          <a:chExt cx="0" cy="0"/>
+        </a:xfrm>
+      </p:grpSpPr>
+      <p:sp>
+        <p:nvSpPr>
+          <p:cNvPr id="2" name="Slide Image Placeholder 1"/>
+          <p:cNvSpPr>
+            <a:spLocks noGrp="1" noRot="1" noChangeAspect="1"/>
+          </p:cNvSpPr>
+          <p:nvPr>
+            <p:ph type="sldImg"/>
+          </p:nvPr>
+        </p:nvSpPr>
+        <p:spPr/>
+      </p:sp>
+      <p:sp>
+        <p:nvSpPr>
+          <p:cNvPr id="3" name="Notes Placeholder 2"/>
+          <p:cNvSpPr>
+            <a:spLocks noGrp="1"/>
+          </p:cNvSpPr>
+          <p:nvPr>
+            <p:ph type="body" idx="1"/>
+          </p:nvPr>
+        </p:nvSpPr>
+        <p:spPr/>
+        <p:txBody>
+          <a:bodyPr/>
+          <a:lstStyle/>
+          <a:p>
+            <a:endParaRPr lang="en-US"/>
+          </a:p>
+        </p:txBody>
+      </p:sp>
+      <p:sp>
+        <p:nvSpPr>
+          <p:cNvPr id="4" name="Slide Number Placeholder 3"/>
+          <p:cNvSpPr>
+            <a:spLocks noGrp="1"/>
+          </p:cNvSpPr>
+          <p:nvPr>
+            <p:ph type="sldNum" sz="quarter" idx="5"/>
+          </p:nvPr>
+        </p:nvSpPr>
+        <p:spPr/>
+        <p:txBody>
+          <a:bodyPr/>
+          <a:lstStyle/>
+          <a:p>
+            <a:fld id="{A04941E9-2A29-D24C-9FC1-C625B8635990}" type="slidenum">
+              <a:rPr lang="en-US" smtClean="0"/>
+              <a:t>7</a:t>
+            </a:fld>
+            <a:endParaRPr lang="en-US"/>
+          </a:p>
+        </p:txBody>
+      </p:sp>
+    </p:spTree>
+    <p:extLst>
+      <p:ext uri="{BB962C8B-B14F-4D97-AF65-F5344CB8AC3E}">
+        <p14:creationId xmlns:p14="http://schemas.microsoft.com/office/powerpoint/2010/main" val="4157188553"/>
+      </p:ext>
+    </p:extLst>
+  </p:cSld>
+  <p:clrMapOvr>
+    <a:masterClrMapping/>
+  </p:clrMapOvr>
+</p:notes>
+</file>
+
+<file path=ppt/notesSlides/notesSlide8.xml><?xml version="1.0" encoding="utf-8"?>
+<p:notes xmlns:a="http://schemas.openxmlformats.org/drawingml/2006/main" xmlns:r="http://schemas.openxmlformats.org/officeDocument/2006/relationships" xmlns:p="http://schemas.openxmlformats.org/presentationml/2006/main">
+  <p:cSld>
+    <p:spTree>
+      <p:nvGrpSpPr>
+        <p:cNvPr id="1" name=""/>
+        <p:cNvGrpSpPr/>
+        <p:nvPr/>
+      </p:nvGrpSpPr>
+      <p:grpSpPr>
+        <a:xfrm>
+          <a:off x="0" y="0"/>
+          <a:ext cx="0" cy="0"/>
+          <a:chOff x="0" y="0"/>
+          <a:chExt cx="0" cy="0"/>
+        </a:xfrm>
+      </p:grpSpPr>
+      <p:sp>
+        <p:nvSpPr>
+          <p:cNvPr id="2" name="Slide Image Placeholder 1"/>
+          <p:cNvSpPr>
+            <a:spLocks noGrp="1" noRot="1" noChangeAspect="1"/>
+          </p:cNvSpPr>
+          <p:nvPr>
+            <p:ph type="sldImg"/>
+          </p:nvPr>
+        </p:nvSpPr>
+        <p:spPr/>
+      </p:sp>
+      <p:sp>
+        <p:nvSpPr>
+          <p:cNvPr id="3" name="Notes Placeholder 2"/>
+          <p:cNvSpPr>
+            <a:spLocks noGrp="1"/>
+          </p:cNvSpPr>
+          <p:nvPr>
+            <p:ph type="body" idx="1"/>
+          </p:nvPr>
+        </p:nvSpPr>
+        <p:spPr/>
+        <p:txBody>
+          <a:bodyPr/>
+          <a:lstStyle/>
+          <a:p>
+            <a:endParaRPr lang="en-US"/>
+          </a:p>
+        </p:txBody>
+      </p:sp>
+      <p:sp>
+        <p:nvSpPr>
+          <p:cNvPr id="4" name="Slide Number Placeholder 3"/>
+          <p:cNvSpPr>
+            <a:spLocks noGrp="1"/>
+          </p:cNvSpPr>
+          <p:nvPr>
+            <p:ph type="sldNum" sz="quarter" idx="5"/>
+          </p:nvPr>
+        </p:nvSpPr>
+        <p:spPr/>
+        <p:txBody>
+          <a:bodyPr/>
+          <a:lstStyle/>
+          <a:p>
+            <a:fld id="{A04941E9-2A29-D24C-9FC1-C625B8635990}" type="slidenum">
+              <a:rPr lang="en-US" smtClean="0"/>
+              <a:t>8</a:t>
+            </a:fld>
+            <a:endParaRPr lang="en-US"/>
+          </a:p>
+        </p:txBody>
+      </p:sp>
+    </p:spTree>
+    <p:extLst>
+      <p:ext uri="{BB962C8B-B14F-4D97-AF65-F5344CB8AC3E}">
+        <p14:creationId xmlns:p14="http://schemas.microsoft.com/office/powerpoint/2010/main" val="972437802"/>
+      </p:ext>
+    </p:extLst>
+  </p:cSld>
+  <p:clrMapOvr>
+    <a:masterClrMapping/>
+  </p:clrMapOvr>
+</p:notes>
+</file>
+
+<file path=ppt/notesSlides/notesSlide9.xml><?xml version="1.0" encoding="utf-8"?>
+<p:notes xmlns:a="http://schemas.openxmlformats.org/drawingml/2006/main" xmlns:r="http://schemas.openxmlformats.org/officeDocument/2006/relationships" xmlns:p="http://schemas.openxmlformats.org/presentationml/2006/main">
+  <p:cSld>
+    <p:spTree>
+      <p:nvGrpSpPr>
+        <p:cNvPr id="1" name=""/>
+        <p:cNvGrpSpPr/>
+        <p:nvPr/>
+      </p:nvGrpSpPr>
+      <p:grpSpPr>
+        <a:xfrm>
+          <a:off x="0" y="0"/>
+          <a:ext cx="0" cy="0"/>
+          <a:chOff x="0" y="0"/>
+          <a:chExt cx="0" cy="0"/>
+        </a:xfrm>
+      </p:grpSpPr>
+      <p:sp>
+        <p:nvSpPr>
+          <p:cNvPr id="2" name="Slide Image Placeholder 1"/>
+          <p:cNvSpPr>
+            <a:spLocks noGrp="1" noRot="1" noChangeAspect="1"/>
+          </p:cNvSpPr>
+          <p:nvPr>
+            <p:ph type="sldImg"/>
+          </p:nvPr>
+        </p:nvSpPr>
+        <p:spPr/>
+      </p:sp>
+      <p:sp>
+        <p:nvSpPr>
+          <p:cNvPr id="3" name="Notes Placeholder 2"/>
+          <p:cNvSpPr>
+            <a:spLocks noGrp="1"/>
+          </p:cNvSpPr>
+          <p:nvPr>
+            <p:ph type="body" idx="1"/>
+          </p:nvPr>
+        </p:nvSpPr>
+        <p:spPr/>
+        <p:txBody>
+          <a:bodyPr/>
+          <a:lstStyle/>
+          <a:p>
+            <a:endParaRPr lang="en-US"/>
+          </a:p>
+        </p:txBody>
+      </p:sp>
+      <p:sp>
+        <p:nvSpPr>
+          <p:cNvPr id="4" name="Slide Number Placeholder 3"/>
+          <p:cNvSpPr>
+            <a:spLocks noGrp="1"/>
+          </p:cNvSpPr>
+          <p:nvPr>
+            <p:ph type="sldNum" sz="quarter" idx="5"/>
+          </p:nvPr>
+        </p:nvSpPr>
+        <p:spPr/>
+        <p:txBody>
+          <a:bodyPr/>
+          <a:lstStyle/>
+          <a:p>
+            <a:fld id="{A04941E9-2A29-D24C-9FC1-C625B8635990}" type="slidenum">
+              <a:rPr lang="en-US" smtClean="0"/>
+              <a:t>9</a:t>
+            </a:fld>
+            <a:endParaRPr lang="en-US"/>
+          </a:p>
+        </p:txBody>
+      </p:sp>
+    </p:spTree>
+    <p:extLst>
+      <p:ext uri="{BB962C8B-B14F-4D97-AF65-F5344CB8AC3E}">
+        <p14:creationId xmlns:p14="http://schemas.microsoft.com/office/powerpoint/2010/main" val="305224654"/>
+      </p:ext>
+    </p:extLst>
+  </p:cSld>
+  <p:clrMapOvr>
+    <a:masterClrMapping/>
+  </p:clrMapOvr>
+</p:notes>
+</file>
+
 <file path=ppt/slideLayouts/slideLayout1.xml><?xml version="1.0" encoding="utf-8"?>
 <p:sldLayout xmlns:a="http://schemas.openxmlformats.org/drawingml/2006/main" xmlns:r="http://schemas.openxmlformats.org/officeDocument/2006/relationships" xmlns:p="http://schemas.openxmlformats.org/presentationml/2006/main" type="title" preserve="1">
   <p:cSld name="Title Slide">
@@ -304,7 +3512,7 @@
           <a:p>
             <a:fld id="{220BD450-5107-424A-9054-544A25915243}" type="datetimeFigureOut">
               <a:rPr lang="en-US" smtClean="0"/>
-              <a:t>3/30/26</a:t>
+              <a:t>3/31/26</a:t>
             </a:fld>
             <a:endParaRPr lang="en-US"/>
           </a:p>
@@ -502,7 +3710,7 @@
           <a:p>
             <a:fld id="{220BD450-5107-424A-9054-544A25915243}" type="datetimeFigureOut">
               <a:rPr lang="en-US" smtClean="0"/>
-              <a:t>3/30/26</a:t>
+              <a:t>3/31/26</a:t>
             </a:fld>
             <a:endParaRPr lang="en-US"/>
           </a:p>
@@ -710,7 +3918,7 @@
           <a:p>
             <a:fld id="{220BD450-5107-424A-9054-544A25915243}" type="datetimeFigureOut">
               <a:rPr lang="en-US" smtClean="0"/>
-              <a:t>3/30/26</a:t>
+              <a:t>3/31/26</a:t>
             </a:fld>
             <a:endParaRPr lang="en-US"/>
           </a:p>
@@ -908,7 +4116,7 @@
           <a:p>
             <a:fld id="{220BD450-5107-424A-9054-544A25915243}" type="datetimeFigureOut">
               <a:rPr lang="en-US" smtClean="0"/>
-              <a:t>3/30/26</a:t>
+              <a:t>3/31/26</a:t>
             </a:fld>
             <a:endParaRPr lang="en-US"/>
           </a:p>
@@ -1183,7 +4391,7 @@
           <a:p>
             <a:fld id="{220BD450-5107-424A-9054-544A25915243}" type="datetimeFigureOut">
               <a:rPr lang="en-US" smtClean="0"/>
-              <a:t>3/30/26</a:t>
+              <a:t>3/31/26</a:t>
             </a:fld>
             <a:endParaRPr lang="en-US"/>
           </a:p>
@@ -1448,7 +4656,7 @@
           <a:p>
             <a:fld id="{220BD450-5107-424A-9054-544A25915243}" type="datetimeFigureOut">
               <a:rPr lang="en-US" smtClean="0"/>
-              <a:t>3/30/26</a:t>
+              <a:t>3/31/26</a:t>
             </a:fld>
             <a:endParaRPr lang="en-US"/>
           </a:p>
@@ -1860,7 +5068,7 @@
           <a:p>
             <a:fld id="{220BD450-5107-424A-9054-544A25915243}" type="datetimeFigureOut">
               <a:rPr lang="en-US" smtClean="0"/>
-              <a:t>3/30/26</a:t>
+              <a:t>3/31/26</a:t>
             </a:fld>
             <a:endParaRPr lang="en-US"/>
           </a:p>
@@ -2001,7 +5209,7 @@
           <a:p>
             <a:fld id="{220BD450-5107-424A-9054-544A25915243}" type="datetimeFigureOut">
               <a:rPr lang="en-US" smtClean="0"/>
-              <a:t>3/30/26</a:t>
+              <a:t>3/31/26</a:t>
             </a:fld>
             <a:endParaRPr lang="en-US"/>
           </a:p>
@@ -2114,7 +5322,7 @@
           <a:p>
             <a:fld id="{220BD450-5107-424A-9054-544A25915243}" type="datetimeFigureOut">
               <a:rPr lang="en-US" smtClean="0"/>
-              <a:t>3/30/26</a:t>
+              <a:t>3/31/26</a:t>
             </a:fld>
             <a:endParaRPr lang="en-US"/>
           </a:p>
@@ -2425,7 +5633,7 @@
           <a:p>
             <a:fld id="{220BD450-5107-424A-9054-544A25915243}" type="datetimeFigureOut">
               <a:rPr lang="en-US" smtClean="0"/>
-              <a:t>3/30/26</a:t>
+              <a:t>3/31/26</a:t>
             </a:fld>
             <a:endParaRPr lang="en-US"/>
           </a:p>
@@ -2713,7 +5921,7 @@
           <a:p>
             <a:fld id="{220BD450-5107-424A-9054-544A25915243}" type="datetimeFigureOut">
               <a:rPr lang="en-US" smtClean="0"/>
-              <a:t>3/30/26</a:t>
+              <a:t>3/31/26</a:t>
             </a:fld>
             <a:endParaRPr lang="en-US"/>
           </a:p>
@@ -2954,7 +6162,7 @@
           <a:p>
             <a:fld id="{220BD450-5107-424A-9054-544A25915243}" type="datetimeFigureOut">
               <a:rPr lang="en-US" smtClean="0"/>
-              <a:t>3/30/26</a:t>
+              <a:t>3/31/26</a:t>
             </a:fld>
             <a:endParaRPr lang="en-US"/>
           </a:p>
@@ -4042,7 +7250,7 @@
           <p:nvPr/>
         </p:nvPicPr>
         <p:blipFill>
-          <a:blip r:embed="rId2"/>
+          <a:blip r:embed="rId3"/>
           <a:stretch>
             <a:fillRect/>
           </a:stretch>
@@ -4753,7 +7961,7 @@
           <p:nvPr/>
         </p:nvPicPr>
         <p:blipFill>
-          <a:blip r:embed="rId2"/>
+          <a:blip r:embed="rId3"/>
           <a:stretch>
             <a:fillRect/>
           </a:stretch>
@@ -5472,7 +8680,7 @@
           <p:nvPr/>
         </p:nvPicPr>
         <p:blipFill>
-          <a:blip r:embed="rId2"/>
+          <a:blip r:embed="rId3"/>
           <a:stretch>
             <a:fillRect/>
           </a:stretch>
@@ -6178,7 +9386,7 @@
           <p:nvPr/>
         </p:nvPicPr>
         <p:blipFill>
-          <a:blip r:embed="rId2"/>
+          <a:blip r:embed="rId3"/>
           <a:stretch>
             <a:fillRect/>
           </a:stretch>
@@ -6884,7 +10092,7 @@
           <p:nvPr/>
         </p:nvPicPr>
         <p:blipFill>
-          <a:blip r:embed="rId2"/>
+          <a:blip r:embed="rId3"/>
           <a:stretch>
             <a:fillRect/>
           </a:stretch>
@@ -7590,7 +10798,7 @@
           <p:nvPr/>
         </p:nvPicPr>
         <p:blipFill>
-          <a:blip r:embed="rId2"/>
+          <a:blip r:embed="rId3"/>
           <a:stretch>
             <a:fillRect/>
           </a:stretch>
@@ -8231,7 +11439,7 @@
           <p:nvPr/>
         </p:nvPicPr>
         <p:blipFill>
-          <a:blip r:embed="rId2"/>
+          <a:blip r:embed="rId3"/>
           <a:stretch>
             <a:fillRect/>
           </a:stretch>
@@ -9012,7 +12220,7 @@
           <p:nvPr/>
         </p:nvPicPr>
         <p:blipFill>
-          <a:blip r:embed="rId2"/>
+          <a:blip r:embed="rId3"/>
           <a:stretch>
             <a:fillRect/>
           </a:stretch>
@@ -9718,7 +12926,7 @@
           <p:nvPr/>
         </p:nvPicPr>
         <p:blipFill>
-          <a:blip r:embed="rId2"/>
+          <a:blip r:embed="rId3"/>
           <a:stretch>
             <a:fillRect/>
           </a:stretch>
@@ -10415,7 +13623,7 @@
           <p:nvPr/>
         </p:nvPicPr>
         <p:blipFill>
-          <a:blip r:embed="rId2"/>
+          <a:blip r:embed="rId3"/>
           <a:stretch>
             <a:fillRect/>
           </a:stretch>
@@ -11042,7 +14250,7 @@
           <p:nvPr/>
         </p:nvPicPr>
         <p:blipFill>
-          <a:blip r:embed="rId2"/>
+          <a:blip r:embed="rId3"/>
           <a:stretch>
             <a:fillRect/>
           </a:stretch>
@@ -12798,7 +16006,7 @@
           <p:nvPr/>
         </p:nvPicPr>
         <p:blipFill>
-          <a:blip r:embed="rId2"/>
+          <a:blip r:embed="rId3"/>
           <a:stretch>
             <a:fillRect/>
           </a:stretch>
@@ -12853,7 +16061,7 @@
           <p:nvPr/>
         </p:nvPicPr>
         <p:blipFill rotWithShape="1">
-          <a:blip r:embed="rId2">
+          <a:blip r:embed="rId3">
             <a:extLst>
               <a:ext uri="{28A0092B-C50C-407E-A947-70E740481C1C}">
                 <a14:useLocalDpi xmlns:a14="http://schemas.microsoft.com/office/drawing/2010/main" val="0"/>
@@ -14210,7 +17418,7 @@
           <p:nvPr/>
         </p:nvPicPr>
         <p:blipFill>
-          <a:blip r:embed="rId2"/>
+          <a:blip r:embed="rId3"/>
           <a:stretch>
             <a:fillRect/>
           </a:stretch>
@@ -14832,7 +18040,7 @@
           <p:nvPr/>
         </p:nvPicPr>
         <p:blipFill>
-          <a:blip r:embed="rId2"/>
+          <a:blip r:embed="rId3"/>
           <a:stretch>
             <a:fillRect/>
           </a:stretch>
@@ -15454,7 +18662,7 @@
           <p:nvPr/>
         </p:nvPicPr>
         <p:blipFill>
-          <a:blip r:embed="rId2"/>
+          <a:blip r:embed="rId3"/>
           <a:stretch>
             <a:fillRect/>
           </a:stretch>
@@ -16076,7 +19284,7 @@
           <p:nvPr/>
         </p:nvPicPr>
         <p:blipFill>
-          <a:blip r:embed="rId2"/>
+          <a:blip r:embed="rId3"/>
           <a:stretch>
             <a:fillRect/>
           </a:stretch>
@@ -16768,7 +19976,7 @@
           <p:nvPr/>
         </p:nvPicPr>
         <p:blipFill>
-          <a:blip r:embed="rId2"/>
+          <a:blip r:embed="rId3"/>
           <a:stretch>
             <a:fillRect/>
           </a:stretch>
@@ -17404,7 +20612,7 @@
           <p:nvPr/>
         </p:nvPicPr>
         <p:blipFill>
-          <a:blip r:embed="rId2"/>
+          <a:blip r:embed="rId3"/>
           <a:stretch>
             <a:fillRect/>
           </a:stretch>
@@ -18122,7 +21330,7 @@
           <p:nvPr/>
         </p:nvPicPr>
         <p:blipFill>
-          <a:blip r:embed="rId2"/>
+          <a:blip r:embed="rId3"/>
           <a:stretch>
             <a:fillRect/>
           </a:stretch>
@@ -18828,7 +22036,7 @@
           <p:nvPr/>
         </p:nvPicPr>
         <p:blipFill>
-          <a:blip r:embed="rId2"/>
+          <a:blip r:embed="rId3"/>
           <a:stretch>
             <a:fillRect/>
           </a:stretch>
@@ -19469,7 +22677,7 @@
           <p:nvPr/>
         </p:nvPicPr>
         <p:blipFill>
-          <a:blip r:embed="rId2"/>
+          <a:blip r:embed="rId3"/>
           <a:stretch>
             <a:fillRect/>
           </a:stretch>
@@ -20105,7 +23313,7 @@
           <p:nvPr/>
         </p:nvPicPr>
         <p:blipFill>
-          <a:blip r:embed="rId2"/>
+          <a:blip r:embed="rId3"/>
           <a:stretch>
             <a:fillRect/>
           </a:stretch>
@@ -20816,7 +24024,7 @@
           <p:nvPr/>
         </p:nvPicPr>
         <p:blipFill>
-          <a:blip r:embed="rId2"/>
+          <a:blip r:embed="rId3"/>
           <a:stretch>
             <a:fillRect/>
           </a:stretch>
@@ -21452,7 +24660,7 @@
           <p:nvPr/>
         </p:nvPicPr>
         <p:blipFill>
-          <a:blip r:embed="rId2"/>
+          <a:blip r:embed="rId3"/>
           <a:stretch>
             <a:fillRect/>
           </a:stretch>
@@ -22163,7 +25371,7 @@
           <p:nvPr/>
         </p:nvPicPr>
         <p:blipFill>
-          <a:blip r:embed="rId2"/>
+          <a:blip r:embed="rId3"/>
           <a:stretch>
             <a:fillRect/>
           </a:stretch>
@@ -22874,7 +26082,7 @@
           <p:nvPr/>
         </p:nvPicPr>
         <p:blipFill>
-          <a:blip r:embed="rId2"/>
+          <a:blip r:embed="rId3"/>
           <a:stretch>
             <a:fillRect/>
           </a:stretch>
@@ -26388,7 +29596,7 @@
           <p:nvPr/>
         </p:nvPicPr>
         <p:blipFill>
-          <a:blip r:embed="rId2"/>
+          <a:blip r:embed="rId3"/>
           <a:stretch>
             <a:fillRect/>
           </a:stretch>
@@ -32342,7 +35550,7 @@
           <p:nvPr/>
         </p:nvPicPr>
         <p:blipFill>
-          <a:blip r:embed="rId2"/>
+          <a:blip r:embed="rId3"/>
           <a:stretch>
             <a:fillRect/>
           </a:stretch>
@@ -32396,7 +35604,7 @@
           <p:nvPr/>
         </p:nvPicPr>
         <p:blipFill>
-          <a:blip r:embed="rId2"/>
+          <a:blip r:embed="rId3"/>
           <a:stretch>
             <a:fillRect/>
           </a:stretch>
@@ -34451,7 +37659,7 @@
           <p:nvPr/>
         </p:nvPicPr>
         <p:blipFill>
-          <a:blip r:embed="rId2"/>
+          <a:blip r:embed="rId3"/>
           <a:stretch>
             <a:fillRect/>
           </a:stretch>
@@ -35157,7 +38365,7 @@
           <p:nvPr/>
         </p:nvPicPr>
         <p:blipFill>
-          <a:blip r:embed="rId2"/>
+          <a:blip r:embed="rId3"/>
           <a:stretch>
             <a:fillRect/>
           </a:stretch>
@@ -35493,4 +38701,319 @@
     </a:ext>
   </a:extLst>
 </a:theme>
+</file>
+
+<file path=ppt/theme/theme2.xml><?xml version="1.0" encoding="utf-8"?>
+<a:theme xmlns:a="http://schemas.openxmlformats.org/drawingml/2006/main" name="Office Theme">
+  <a:themeElements>
+    <a:clrScheme name="Office">
+      <a:dk1>
+        <a:sysClr val="windowText" lastClr="000000"/>
+      </a:dk1>
+      <a:lt1>
+        <a:sysClr val="window" lastClr="FFFFFF"/>
+      </a:lt1>
+      <a:dk2>
+        <a:srgbClr val="0E2841"/>
+      </a:dk2>
+      <a:lt2>
+        <a:srgbClr val="E8E8E8"/>
+      </a:lt2>
+      <a:accent1>
+        <a:srgbClr val="156082"/>
+      </a:accent1>
+      <a:accent2>
+        <a:srgbClr val="E97132"/>
+      </a:accent2>
+      <a:accent3>
+        <a:srgbClr val="196B24"/>
+      </a:accent3>
+      <a:accent4>
+        <a:srgbClr val="0F9ED5"/>
+      </a:accent4>
+      <a:accent5>
+        <a:srgbClr val="A02B93"/>
+      </a:accent5>
+      <a:accent6>
+        <a:srgbClr val="4EA72E"/>
+      </a:accent6>
+      <a:hlink>
+        <a:srgbClr val="467886"/>
+      </a:hlink>
+      <a:folHlink>
+        <a:srgbClr val="96607D"/>
+      </a:folHlink>
+    </a:clrScheme>
+    <a:fontScheme name="Office">
+      <a:majorFont>
+        <a:latin typeface="Aptos Display" panose="02110004020202020204"/>
+        <a:ea typeface=""/>
+        <a:cs typeface=""/>
+        <a:font script="Jpan" typeface="游ゴシック Light"/>
+        <a:font script="Hang" typeface="맑은 고딕"/>
+        <a:font script="Hans" typeface="等线 Light"/>
+        <a:font script="Hant" typeface="新細明體"/>
+        <a:font script="Arab" typeface="Times New Roman"/>
+        <a:font script="Hebr" typeface="Times New Roman"/>
+        <a:font script="Thai" typeface="Angsana New"/>
+        <a:font script="Ethi" typeface="Nyala"/>
+        <a:font script="Beng" typeface="Vrinda"/>
+        <a:font script="Gujr" typeface="Shruti"/>
+        <a:font script="Khmr" typeface="MoolBoran"/>
+        <a:font script="Knda" typeface="Tunga"/>
+        <a:font script="Guru" typeface="Raavi"/>
+        <a:font script="Cans" typeface="Euphemia"/>
+        <a:font script="Cher" typeface="Plantagenet Cherokee"/>
+        <a:font script="Yiii" typeface="Microsoft Yi Baiti"/>
+        <a:font script="Tibt" typeface="Microsoft Himalaya"/>
+        <a:font script="Thaa" typeface="MV Boli"/>
+        <a:font script="Deva" typeface="Mangal"/>
+        <a:font script="Telu" typeface="Gautami"/>
+        <a:font script="Taml" typeface="Latha"/>
+        <a:font script="Syrc" typeface="Estrangelo Edessa"/>
+        <a:font script="Orya" typeface="Kalinga"/>
+        <a:font script="Mlym" typeface="Kartika"/>
+        <a:font script="Laoo" typeface="DokChampa"/>
+        <a:font script="Sinh" typeface="Iskoola Pota"/>
+        <a:font script="Mong" typeface="Mongolian Baiti"/>
+        <a:font script="Viet" typeface="Times New Roman"/>
+        <a:font script="Uigh" typeface="Microsoft Uighur"/>
+        <a:font script="Geor" typeface="Sylfaen"/>
+        <a:font script="Armn" typeface="Arial"/>
+        <a:font script="Bugi" typeface="Leelawadee UI"/>
+        <a:font script="Bopo" typeface="Microsoft JhengHei"/>
+        <a:font script="Java" typeface="Javanese Text"/>
+        <a:font script="Lisu" typeface="Segoe UI"/>
+        <a:font script="Mymr" typeface="Myanmar Text"/>
+        <a:font script="Nkoo" typeface="Ebrima"/>
+        <a:font script="Olck" typeface="Nirmala UI"/>
+        <a:font script="Osma" typeface="Ebrima"/>
+        <a:font script="Phag" typeface="Phagspa"/>
+        <a:font script="Syrn" typeface="Estrangelo Edessa"/>
+        <a:font script="Syrj" typeface="Estrangelo Edessa"/>
+        <a:font script="Syre" typeface="Estrangelo Edessa"/>
+        <a:font script="Sora" typeface="Nirmala UI"/>
+        <a:font script="Tale" typeface="Microsoft Tai Le"/>
+        <a:font script="Talu" typeface="Microsoft New Tai Lue"/>
+        <a:font script="Tfng" typeface="Ebrima"/>
+      </a:majorFont>
+      <a:minorFont>
+        <a:latin typeface="Aptos" panose="02110004020202020204"/>
+        <a:ea typeface=""/>
+        <a:cs typeface=""/>
+        <a:font script="Jpan" typeface="游ゴシック"/>
+        <a:font script="Hang" typeface="맑은 고딕"/>
+        <a:font script="Hans" typeface="等线"/>
+        <a:font script="Hant" typeface="新細明體"/>
+        <a:font script="Arab" typeface="Arial"/>
+        <a:font script="Hebr" typeface="Arial"/>
+        <a:font script="Thai" typeface="Cordia New"/>
+        <a:font script="Ethi" typeface="Nyala"/>
+        <a:font script="Beng" typeface="Vrinda"/>
+        <a:font script="Gujr" typeface="Shruti"/>
+        <a:font script="Khmr" typeface="DaunPenh"/>
+        <a:font script="Knda" typeface="Tunga"/>
+        <a:font script="Guru" typeface="Raavi"/>
+        <a:font script="Cans" typeface="Euphemia"/>
+        <a:font script="Cher" typeface="Plantagenet Cherokee"/>
+        <a:font script="Yiii" typeface="Microsoft Yi Baiti"/>
+        <a:font script="Tibt" typeface="Microsoft Himalaya"/>
+        <a:font script="Thaa" typeface="MV Boli"/>
+        <a:font script="Deva" typeface="Mangal"/>
+        <a:font script="Telu" typeface="Gautami"/>
+        <a:font script="Taml" typeface="Latha"/>
+        <a:font script="Syrc" typeface="Estrangelo Edessa"/>
+        <a:font script="Orya" typeface="Kalinga"/>
+        <a:font script="Mlym" typeface="Kartika"/>
+        <a:font script="Laoo" typeface="DokChampa"/>
+        <a:font script="Sinh" typeface="Iskoola Pota"/>
+        <a:font script="Mong" typeface="Mongolian Baiti"/>
+        <a:font script="Viet" typeface="Arial"/>
+        <a:font script="Uigh" typeface="Microsoft Uighur"/>
+        <a:font script="Geor" typeface="Sylfaen"/>
+        <a:font script="Armn" typeface="Arial"/>
+        <a:font script="Bugi" typeface="Leelawadee UI"/>
+        <a:font script="Bopo" typeface="Microsoft JhengHei"/>
+        <a:font script="Java" typeface="Javanese Text"/>
+        <a:font script="Lisu" typeface="Segoe UI"/>
+        <a:font script="Mymr" typeface="Myanmar Text"/>
+        <a:font script="Nkoo" typeface="Ebrima"/>
+        <a:font script="Olck" typeface="Nirmala UI"/>
+        <a:font script="Osma" typeface="Ebrima"/>
+        <a:font script="Phag" typeface="Phagspa"/>
+        <a:font script="Syrn" typeface="Estrangelo Edessa"/>
+        <a:font script="Syrj" typeface="Estrangelo Edessa"/>
+        <a:font script="Syre" typeface="Estrangelo Edessa"/>
+        <a:font script="Sora" typeface="Nirmala UI"/>
+        <a:font script="Tale" typeface="Microsoft Tai Le"/>
+        <a:font script="Talu" typeface="Microsoft New Tai Lue"/>
+        <a:font script="Tfng" typeface="Ebrima"/>
+      </a:minorFont>
+    </a:fontScheme>
+    <a:fmtScheme name="Office">
+      <a:fillStyleLst>
+        <a:solidFill>
+          <a:schemeClr val="phClr"/>
+        </a:solidFill>
+        <a:gradFill rotWithShape="1">
+          <a:gsLst>
+            <a:gs pos="0">
+              <a:schemeClr val="phClr">
+                <a:lumMod val="110000"/>
+                <a:satMod val="105000"/>
+                <a:tint val="67000"/>
+              </a:schemeClr>
+            </a:gs>
+            <a:gs pos="50000">
+              <a:schemeClr val="phClr">
+                <a:lumMod val="105000"/>
+                <a:satMod val="103000"/>
+                <a:tint val="73000"/>
+              </a:schemeClr>
+            </a:gs>
+            <a:gs pos="100000">
+              <a:schemeClr val="phClr">
+                <a:lumMod val="105000"/>
+                <a:satMod val="109000"/>
+                <a:tint val="81000"/>
+              </a:schemeClr>
+            </a:gs>
+          </a:gsLst>
+          <a:lin ang="5400000" scaled="0"/>
+        </a:gradFill>
+        <a:gradFill rotWithShape="1">
+          <a:gsLst>
+            <a:gs pos="0">
+              <a:schemeClr val="phClr">
+                <a:satMod val="103000"/>
+                <a:lumMod val="102000"/>
+                <a:tint val="94000"/>
+              </a:schemeClr>
+            </a:gs>
+            <a:gs pos="50000">
+              <a:schemeClr val="phClr">
+                <a:satMod val="110000"/>
+                <a:lumMod val="100000"/>
+                <a:shade val="100000"/>
+              </a:schemeClr>
+            </a:gs>
+            <a:gs pos="100000">
+              <a:schemeClr val="phClr">
+                <a:lumMod val="99000"/>
+                <a:satMod val="120000"/>
+                <a:shade val="78000"/>
+              </a:schemeClr>
+            </a:gs>
+          </a:gsLst>
+          <a:lin ang="5400000" scaled="0"/>
+        </a:gradFill>
+      </a:fillStyleLst>
+      <a:lnStyleLst>
+        <a:ln w="12700" cap="flat" cmpd="sng" algn="ctr">
+          <a:solidFill>
+            <a:schemeClr val="phClr"/>
+          </a:solidFill>
+          <a:prstDash val="solid"/>
+          <a:miter lim="800000"/>
+        </a:ln>
+        <a:ln w="19050" cap="flat" cmpd="sng" algn="ctr">
+          <a:solidFill>
+            <a:schemeClr val="phClr"/>
+          </a:solidFill>
+          <a:prstDash val="solid"/>
+          <a:miter lim="800000"/>
+        </a:ln>
+        <a:ln w="25400" cap="flat" cmpd="sng" algn="ctr">
+          <a:solidFill>
+            <a:schemeClr val="phClr"/>
+          </a:solidFill>
+          <a:prstDash val="solid"/>
+          <a:miter lim="800000"/>
+        </a:ln>
+      </a:lnStyleLst>
+      <a:effectStyleLst>
+        <a:effectStyle>
+          <a:effectLst/>
+        </a:effectStyle>
+        <a:effectStyle>
+          <a:effectLst/>
+        </a:effectStyle>
+        <a:effectStyle>
+          <a:effectLst>
+            <a:outerShdw blurRad="57150" dist="19050" dir="5400000" algn="ctr" rotWithShape="0">
+              <a:srgbClr val="000000">
+                <a:alpha val="63000"/>
+              </a:srgbClr>
+            </a:outerShdw>
+          </a:effectLst>
+        </a:effectStyle>
+      </a:effectStyleLst>
+      <a:bgFillStyleLst>
+        <a:solidFill>
+          <a:schemeClr val="phClr"/>
+        </a:solidFill>
+        <a:solidFill>
+          <a:schemeClr val="phClr">
+            <a:tint val="95000"/>
+            <a:satMod val="170000"/>
+          </a:schemeClr>
+        </a:solidFill>
+        <a:gradFill rotWithShape="1">
+          <a:gsLst>
+            <a:gs pos="0">
+              <a:schemeClr val="phClr">
+                <a:tint val="93000"/>
+                <a:satMod val="150000"/>
+                <a:shade val="98000"/>
+                <a:lumMod val="102000"/>
+              </a:schemeClr>
+            </a:gs>
+            <a:gs pos="50000">
+              <a:schemeClr val="phClr">
+                <a:tint val="98000"/>
+                <a:satMod val="130000"/>
+                <a:shade val="90000"/>
+                <a:lumMod val="103000"/>
+              </a:schemeClr>
+            </a:gs>
+            <a:gs pos="100000">
+              <a:schemeClr val="phClr">
+                <a:shade val="63000"/>
+                <a:satMod val="120000"/>
+              </a:schemeClr>
+            </a:gs>
+          </a:gsLst>
+          <a:lin ang="5400000" scaled="0"/>
+        </a:gradFill>
+      </a:bgFillStyleLst>
+    </a:fmtScheme>
+  </a:themeElements>
+  <a:objectDefaults>
+    <a:lnDef>
+      <a:spPr/>
+      <a:bodyPr/>
+      <a:lstStyle/>
+      <a:style>
+        <a:lnRef idx="2">
+          <a:schemeClr val="accent1"/>
+        </a:lnRef>
+        <a:fillRef idx="0">
+          <a:schemeClr val="accent1"/>
+        </a:fillRef>
+        <a:effectRef idx="1">
+          <a:schemeClr val="accent1"/>
+        </a:effectRef>
+        <a:fontRef idx="minor">
+          <a:schemeClr val="tx1"/>
+        </a:fontRef>
+      </a:style>
+    </a:lnDef>
+  </a:objectDefaults>
+  <a:extraClrSchemeLst/>
+  <a:extLst>
+    <a:ext uri="{05A4C25C-085E-4340-85A3-A5531E510DB2}">
+      <thm15:themeFamily xmlns:thm15="http://schemas.microsoft.com/office/thememl/2012/main" name="Office Theme" id="{2E142A2C-CD16-42D6-873A-C26D2A0506FA}" vid="{1BDDFF52-6CD6-40A5-AB3C-68EB2F1E4D0A}"/>
+    </a:ext>
+  </a:extLst>
+</a:theme>
 </file>
--- a/docs/Epstein/Epstein_Murders.pptx
+++ b/docs/Epstein/Epstein_Murders.pptx
@@ -10,10 +10,10 @@
   <p:sldIdLst>
     <p:sldId id="274" r:id="rId2"/>
     <p:sldId id="323" r:id="rId3"/>
-    <p:sldId id="275" r:id="rId4"/>
-    <p:sldId id="278" r:id="rId5"/>
-    <p:sldId id="304" r:id="rId6"/>
-    <p:sldId id="279" r:id="rId7"/>
+    <p:sldId id="278" r:id="rId4"/>
+    <p:sldId id="304" r:id="rId5"/>
+    <p:sldId id="279" r:id="rId6"/>
+    <p:sldId id="275" r:id="rId7"/>
     <p:sldId id="280" r:id="rId8"/>
     <p:sldId id="283" r:id="rId9"/>
     <p:sldId id="286" r:id="rId10"/>
@@ -242,7 +242,7 @@
           <a:p>
             <a:fld id="{2A52D83E-74AB-3646-8A13-99BB64ACBD28}" type="datetimeFigureOut">
               <a:rPr lang="en-US" smtClean="0"/>
-              <a:t>3/31/26</a:t>
+              <a:t>4/2/26</a:t>
             </a:fld>
             <a:endParaRPr lang="en-US"/>
           </a:p>
@@ -2431,7 +2431,7 @@
     </p:spTree>
     <p:extLst>
       <p:ext uri="{BB962C8B-B14F-4D97-AF65-F5344CB8AC3E}">
-        <p14:creationId xmlns:p14="http://schemas.microsoft.com/office/powerpoint/2010/main" val="117880216"/>
+        <p14:creationId xmlns:p14="http://schemas.microsoft.com/office/powerpoint/2010/main" val="3011562541"/>
       </p:ext>
     </p:extLst>
   </p:cSld>
@@ -2935,7 +2935,7 @@
     </p:spTree>
     <p:extLst>
       <p:ext uri="{BB962C8B-B14F-4D97-AF65-F5344CB8AC3E}">
-        <p14:creationId xmlns:p14="http://schemas.microsoft.com/office/powerpoint/2010/main" val="3011562541"/>
+        <p14:creationId xmlns:p14="http://schemas.microsoft.com/office/powerpoint/2010/main" val="1677654904"/>
       </p:ext>
     </p:extLst>
   </p:cSld>
@@ -3019,7 +3019,7 @@
     </p:spTree>
     <p:extLst>
       <p:ext uri="{BB962C8B-B14F-4D97-AF65-F5344CB8AC3E}">
-        <p14:creationId xmlns:p14="http://schemas.microsoft.com/office/powerpoint/2010/main" val="1677654904"/>
+        <p14:creationId xmlns:p14="http://schemas.microsoft.com/office/powerpoint/2010/main" val="2347298444"/>
       </p:ext>
     </p:extLst>
   </p:cSld>
@@ -3103,7 +3103,7 @@
     </p:spTree>
     <p:extLst>
       <p:ext uri="{BB962C8B-B14F-4D97-AF65-F5344CB8AC3E}">
-        <p14:creationId xmlns:p14="http://schemas.microsoft.com/office/powerpoint/2010/main" val="2347298444"/>
+        <p14:creationId xmlns:p14="http://schemas.microsoft.com/office/powerpoint/2010/main" val="117880216"/>
       </p:ext>
     </p:extLst>
   </p:cSld>
@@ -3512,7 +3512,7 @@
           <a:p>
             <a:fld id="{220BD450-5107-424A-9054-544A25915243}" type="datetimeFigureOut">
               <a:rPr lang="en-US" smtClean="0"/>
-              <a:t>3/31/26</a:t>
+              <a:t>4/2/26</a:t>
             </a:fld>
             <a:endParaRPr lang="en-US"/>
           </a:p>
@@ -3710,7 +3710,7 @@
           <a:p>
             <a:fld id="{220BD450-5107-424A-9054-544A25915243}" type="datetimeFigureOut">
               <a:rPr lang="en-US" smtClean="0"/>
-              <a:t>3/31/26</a:t>
+              <a:t>4/2/26</a:t>
             </a:fld>
             <a:endParaRPr lang="en-US"/>
           </a:p>
@@ -3918,7 +3918,7 @@
           <a:p>
             <a:fld id="{220BD450-5107-424A-9054-544A25915243}" type="datetimeFigureOut">
               <a:rPr lang="en-US" smtClean="0"/>
-              <a:t>3/31/26</a:t>
+              <a:t>4/2/26</a:t>
             </a:fld>
             <a:endParaRPr lang="en-US"/>
           </a:p>
@@ -4116,7 +4116,7 @@
           <a:p>
             <a:fld id="{220BD450-5107-424A-9054-544A25915243}" type="datetimeFigureOut">
               <a:rPr lang="en-US" smtClean="0"/>
-              <a:t>3/31/26</a:t>
+              <a:t>4/2/26</a:t>
             </a:fld>
             <a:endParaRPr lang="en-US"/>
           </a:p>
@@ -4391,7 +4391,7 @@
           <a:p>
             <a:fld id="{220BD450-5107-424A-9054-544A25915243}" type="datetimeFigureOut">
               <a:rPr lang="en-US" smtClean="0"/>
-              <a:t>3/31/26</a:t>
+              <a:t>4/2/26</a:t>
             </a:fld>
             <a:endParaRPr lang="en-US"/>
           </a:p>
@@ -4656,7 +4656,7 @@
           <a:p>
             <a:fld id="{220BD450-5107-424A-9054-544A25915243}" type="datetimeFigureOut">
               <a:rPr lang="en-US" smtClean="0"/>
-              <a:t>3/31/26</a:t>
+              <a:t>4/2/26</a:t>
             </a:fld>
             <a:endParaRPr lang="en-US"/>
           </a:p>
@@ -5068,7 +5068,7 @@
           <a:p>
             <a:fld id="{220BD450-5107-424A-9054-544A25915243}" type="datetimeFigureOut">
               <a:rPr lang="en-US" smtClean="0"/>
-              <a:t>3/31/26</a:t>
+              <a:t>4/2/26</a:t>
             </a:fld>
             <a:endParaRPr lang="en-US"/>
           </a:p>
@@ -5209,7 +5209,7 @@
           <a:p>
             <a:fld id="{220BD450-5107-424A-9054-544A25915243}" type="datetimeFigureOut">
               <a:rPr lang="en-US" smtClean="0"/>
-              <a:t>3/31/26</a:t>
+              <a:t>4/2/26</a:t>
             </a:fld>
             <a:endParaRPr lang="en-US"/>
           </a:p>
@@ -5322,7 +5322,7 @@
           <a:p>
             <a:fld id="{220BD450-5107-424A-9054-544A25915243}" type="datetimeFigureOut">
               <a:rPr lang="en-US" smtClean="0"/>
-              <a:t>3/31/26</a:t>
+              <a:t>4/2/26</a:t>
             </a:fld>
             <a:endParaRPr lang="en-US"/>
           </a:p>
@@ -5633,7 +5633,7 @@
           <a:p>
             <a:fld id="{220BD450-5107-424A-9054-544A25915243}" type="datetimeFigureOut">
               <a:rPr lang="en-US" smtClean="0"/>
-              <a:t>3/31/26</a:t>
+              <a:t>4/2/26</a:t>
             </a:fld>
             <a:endParaRPr lang="en-US"/>
           </a:p>
@@ -5921,7 +5921,7 @@
           <a:p>
             <a:fld id="{220BD450-5107-424A-9054-544A25915243}" type="datetimeFigureOut">
               <a:rPr lang="en-US" smtClean="0"/>
-              <a:t>3/31/26</a:t>
+              <a:t>4/2/26</a:t>
             </a:fld>
             <a:endParaRPr lang="en-US"/>
           </a:p>
@@ -6162,7 +6162,7 @@
           <a:p>
             <a:fld id="{220BD450-5107-424A-9054-544A25915243}" type="datetimeFigureOut">
               <a:rPr lang="en-US" smtClean="0"/>
-              <a:t>3/31/26</a:t>
+              <a:t>4/2/26</a:t>
             </a:fld>
             <a:endParaRPr lang="en-US"/>
           </a:p>
@@ -8003,6 +8003,119 @@
       </p:grpSpPr>
       <p:sp>
         <p:nvSpPr>
+          <p:cNvPr id="10" name="TextBox 9">
+            <a:extLst>
+              <a:ext uri="{FF2B5EF4-FFF2-40B4-BE49-F238E27FC236}">
+                <a16:creationId xmlns:a16="http://schemas.microsoft.com/office/drawing/2014/main" id="{ABFEA484-AE6A-906E-D59E-C3F7E9DDD90C}"/>
+              </a:ext>
+            </a:extLst>
+          </p:cNvPr>
+          <p:cNvSpPr txBox="1"/>
+          <p:nvPr/>
+        </p:nvSpPr>
+        <p:spPr>
+          <a:xfrm>
+            <a:off x="137401" y="1912840"/>
+            <a:ext cx="8359710" cy="3447098"/>
+          </a:xfrm>
+          <a:prstGeom prst="rect">
+            <a:avLst/>
+          </a:prstGeom>
+          <a:solidFill>
+            <a:schemeClr val="bg1">
+              <a:alpha val="84400"/>
+            </a:schemeClr>
+          </a:solidFill>
+        </p:spPr>
+        <p:txBody>
+          <a:bodyPr wrap="square" rtlCol="0">
+            <a:spAutoFit/>
+          </a:bodyPr>
+          <a:lstStyle/>
+          <a:p>
+            <a:pPr marL="285750" indent="-285750">
+              <a:spcBef>
+                <a:spcPts val="1200"/>
+              </a:spcBef>
+              <a:buFont typeface="Arial" panose="020B0604020202020204" pitchFamily="34" charset="0"/>
+              <a:buChar char="•"/>
+            </a:pPr>
+            <a:r>
+              <a:rPr dirty="0"/>
+              <a:t>Dropped DEAD of heart failure at age 43 while walking near his home — hours after telling a friend he had EXPLOSIVE videos to release.</a:t>
+            </a:r>
+          </a:p>
+          <a:p>
+            <a:pPr marL="285750" indent="-285750">
+              <a:spcBef>
+                <a:spcPts val="1200"/>
+              </a:spcBef>
+              <a:buFont typeface="Arial" panose="020B0604020202020204" pitchFamily="34" charset="0"/>
+              <a:buChar char="•"/>
+            </a:pPr>
+            <a:r>
+              <a:rPr dirty="0"/>
+              <a:t>In 2011 he tweeted: "How prog-guru John Podesta isn't household name as world class UNDERAGE SEX SLAVE OP cover-</a:t>
+            </a:r>
+            <a:r>
+              <a:rPr dirty="0" err="1"/>
+              <a:t>upperer</a:t>
+            </a:r>
+            <a:r>
+              <a:rPr dirty="0"/>
+              <a:t> is beyond me."</a:t>
+            </a:r>
+          </a:p>
+          <a:p>
+            <a:pPr marL="285750" indent="-285750">
+              <a:spcBef>
+                <a:spcPts val="1200"/>
+              </a:spcBef>
+              <a:buFont typeface="Arial" panose="020B0604020202020204" pitchFamily="34" charset="0"/>
+              <a:buChar char="•"/>
+            </a:pPr>
+            <a:r>
+              <a:rPr dirty="0"/>
+              <a:t>Eyewitness said his face was BRIGHT RED — consistent with POISONING, not cardiac arrest, where victims turn blue or gray.</a:t>
+            </a:r>
+          </a:p>
+          <a:p>
+            <a:pPr marL="285750" indent="-285750">
+              <a:spcBef>
+                <a:spcPts val="1200"/>
+              </a:spcBef>
+              <a:buFont typeface="Arial" panose="020B0604020202020204" pitchFamily="34" charset="0"/>
+              <a:buChar char="•"/>
+            </a:pPr>
+            <a:r>
+              <a:rPr dirty="0"/>
+              <a:t>The coroner's technician who handled his AUTOPSY died of suspected ARSENIC POISONING weeks later.</a:t>
+            </a:r>
+          </a:p>
+          <a:p>
+            <a:pPr marL="285750" indent="-285750">
+              <a:spcBef>
+                <a:spcPts val="1200"/>
+              </a:spcBef>
+              <a:buFont typeface="Arial" panose="020B0604020202020204" pitchFamily="34" charset="0"/>
+              <a:buChar char="•"/>
+            </a:pPr>
+            <a:r>
+              <a:rPr dirty="0"/>
+              <a:t>He broke the original Weiner sexting scandal — the laptop that later </a:t>
+            </a:r>
+            <a:br>
+              <a:rPr lang="en-US" dirty="0"/>
+            </a:br>
+            <a:r>
+              <a:rPr dirty="0"/>
+              <a:t>allegedly tied to Epstein-adjacent networks.</a:t>
+            </a:r>
+          </a:p>
+        </p:txBody>
+      </p:sp>
+      <p:sp>
+        <p:nvSpPr>
           <p:cNvPr id="15" name="TextBox 14">
             <a:extLst>
               <a:ext uri="{FF2B5EF4-FFF2-40B4-BE49-F238E27FC236}">
@@ -8472,112 +8585,6 @@
               <a:cs typeface="Arial"/>
               <a:sym typeface="Arial"/>
             </a:endParaRPr>
-          </a:p>
-        </p:txBody>
-      </p:sp>
-      <p:sp>
-        <p:nvSpPr>
-          <p:cNvPr id="10" name="TextBox 9">
-            <a:extLst>
-              <a:ext uri="{FF2B5EF4-FFF2-40B4-BE49-F238E27FC236}">
-                <a16:creationId xmlns:a16="http://schemas.microsoft.com/office/drawing/2014/main" id="{ABFEA484-AE6A-906E-D59E-C3F7E9DDD90C}"/>
-              </a:ext>
-            </a:extLst>
-          </p:cNvPr>
-          <p:cNvSpPr txBox="1"/>
-          <p:nvPr/>
-        </p:nvSpPr>
-        <p:spPr>
-          <a:xfrm>
-            <a:off x="137401" y="1912840"/>
-            <a:ext cx="8359710" cy="3447098"/>
-          </a:xfrm>
-          <a:prstGeom prst="rect">
-            <a:avLst/>
-          </a:prstGeom>
-          <a:solidFill>
-            <a:schemeClr val="bg1">
-              <a:alpha val="84400"/>
-            </a:schemeClr>
-          </a:solidFill>
-        </p:spPr>
-        <p:txBody>
-          <a:bodyPr wrap="square" rtlCol="0">
-            <a:spAutoFit/>
-          </a:bodyPr>
-          <a:lstStyle/>
-          <a:p>
-            <a:pPr marL="285750" indent="-285750">
-              <a:spcBef>
-                <a:spcPts val="1200"/>
-              </a:spcBef>
-              <a:buFont typeface="Arial" panose="020B0604020202020204" pitchFamily="34" charset="0"/>
-              <a:buChar char="•"/>
-            </a:pPr>
-            <a:r>
-              <a:rPr dirty="0"/>
-              <a:t>Dropped DEAD of heart failure at age 43 while walking near his home — hours after telling a friend he had EXPLOSIVE videos to release.</a:t>
-            </a:r>
-          </a:p>
-          <a:p>
-            <a:pPr marL="285750" indent="-285750">
-              <a:spcBef>
-                <a:spcPts val="1200"/>
-              </a:spcBef>
-              <a:buFont typeface="Arial" panose="020B0604020202020204" pitchFamily="34" charset="0"/>
-              <a:buChar char="•"/>
-            </a:pPr>
-            <a:r>
-              <a:rPr dirty="0"/>
-              <a:t>In 2011 he tweeted: "How prog-guru John Podesta isn't household name as world class UNDERAGE SEX SLAVE OP cover-</a:t>
-            </a:r>
-            <a:r>
-              <a:rPr dirty="0" err="1"/>
-              <a:t>upperer</a:t>
-            </a:r>
-            <a:r>
-              <a:rPr dirty="0"/>
-              <a:t> is beyond me."</a:t>
-            </a:r>
-          </a:p>
-          <a:p>
-            <a:pPr marL="285750" indent="-285750">
-              <a:spcBef>
-                <a:spcPts val="1200"/>
-              </a:spcBef>
-              <a:buFont typeface="Arial" panose="020B0604020202020204" pitchFamily="34" charset="0"/>
-              <a:buChar char="•"/>
-            </a:pPr>
-            <a:r>
-              <a:rPr dirty="0"/>
-              <a:t>Eyewitness said his face was BRIGHT RED — consistent with POISONING, not cardiac arrest, where victims turn blue or gray.</a:t>
-            </a:r>
-          </a:p>
-          <a:p>
-            <a:pPr marL="285750" indent="-285750">
-              <a:spcBef>
-                <a:spcPts val="1200"/>
-              </a:spcBef>
-              <a:buFont typeface="Arial" panose="020B0604020202020204" pitchFamily="34" charset="0"/>
-              <a:buChar char="•"/>
-            </a:pPr>
-            <a:r>
-              <a:rPr dirty="0"/>
-              <a:t>The coroner's technician who handled his AUTOPSY died of suspected ARSENIC POISONING weeks later.</a:t>
-            </a:r>
-          </a:p>
-          <a:p>
-            <a:pPr marL="285750" indent="-285750">
-              <a:spcBef>
-                <a:spcPts val="1200"/>
-              </a:spcBef>
-              <a:buFont typeface="Arial" panose="020B0604020202020204" pitchFamily="34" charset="0"/>
-              <a:buChar char="•"/>
-            </a:pPr>
-            <a:r>
-              <a:rPr dirty="0"/>
-              <a:t>He broke the original Weiner sexting scandal — the laptop that later allegedly tied to Epstein-adjacent networks.</a:t>
-            </a:r>
           </a:p>
         </p:txBody>
       </p:sp>
@@ -22076,6 +22083,30 @@
           <a:chExt cx="0" cy="0"/>
         </a:xfrm>
       </p:grpSpPr>
+      <p:pic>
+        <p:nvPicPr>
+          <p:cNvPr id="16" name="Picture 15" descr="Anne_Heche.jpg"/>
+          <p:cNvPicPr>
+            <a:picLocks noChangeAspect="1"/>
+          </p:cNvPicPr>
+          <p:nvPr/>
+        </p:nvPicPr>
+        <p:blipFill>
+          <a:blip r:embed="rId3"/>
+          <a:stretch>
+            <a:fillRect/>
+          </a:stretch>
+        </p:blipFill>
+        <p:spPr>
+          <a:xfrm>
+            <a:off x="9291633" y="1084146"/>
+            <a:ext cx="2892736" cy="3856982"/>
+          </a:xfrm>
+          <a:prstGeom prst="rect">
+            <a:avLst/>
+          </a:prstGeom>
+        </p:spPr>
+      </p:pic>
       <p:sp>
         <p:nvSpPr>
           <p:cNvPr id="15" name="TextBox 14">
@@ -22114,7 +22145,7 @@
                   <a:schemeClr val="accent5"/>
                 </a:solidFill>
               </a:rPr>
-              <a:t>Why / How they Anastasia Drozdova:</a:t>
+              <a:t>Why / How they Anne Heche:</a:t>
             </a:r>
           </a:p>
         </p:txBody>
@@ -22425,7 +22456,7 @@
         <p:spPr>
           <a:xfrm>
             <a:off x="7506336" y="4925186"/>
-            <a:ext cx="4550222" cy="1564583"/>
+            <a:ext cx="4550222" cy="869505"/>
           </a:xfrm>
           <a:prstGeom prst="rect">
             <a:avLst/>
@@ -22466,7 +22497,7 @@
                   <a:schemeClr val="lt1"/>
                 </a:solidFill>
               </a:rPr>
-              <a:t>Anastasia Drozdova</a:t>
+              <a:t>Anne Heche</a:t>
             </a:r>
             <a:endParaRPr sz="3200" b="0" i="0" u="none" strike="noStrike" cap="none" dirty="0">
               <a:solidFill>
@@ -22482,6 +22513,76 @@
       </p:sp>
       <p:sp>
         <p:nvSpPr>
+          <p:cNvPr id="8" name="Google Shape;170;p31">
+            <a:extLst>
+              <a:ext uri="{FF2B5EF4-FFF2-40B4-BE49-F238E27FC236}">
+                <a16:creationId xmlns:a16="http://schemas.microsoft.com/office/drawing/2014/main" id="{B069CCDF-FA80-D75C-7412-189D5C3D3A16}"/>
+              </a:ext>
+            </a:extLst>
+          </p:cNvPr>
+          <p:cNvSpPr/>
+          <p:nvPr/>
+        </p:nvSpPr>
+        <p:spPr>
+          <a:xfrm>
+            <a:off x="7526107" y="5681420"/>
+            <a:ext cx="4550222" cy="548230"/>
+          </a:xfrm>
+          <a:prstGeom prst="rect">
+            <a:avLst/>
+          </a:prstGeom>
+          <a:solidFill>
+            <a:srgbClr val="C00000"/>
+          </a:solidFill>
+          <a:ln>
+            <a:noFill/>
+          </a:ln>
+        </p:spPr>
+        <p:txBody>
+          <a:bodyPr spcFirstLastPara="1" wrap="square" lIns="91425" tIns="45700" rIns="91425" bIns="45700" anchor="ctr" anchorCtr="0">
+            <a:noAutofit/>
+          </a:bodyPr>
+          <a:lstStyle/>
+          <a:p>
+            <a:pPr marL="0" marR="0" lvl="0" indent="0" algn="ctr" rtl="0">
+              <a:lnSpc>
+                <a:spcPct val="100000"/>
+              </a:lnSpc>
+              <a:spcBef>
+                <a:spcPts val="0"/>
+              </a:spcBef>
+              <a:spcAft>
+                <a:spcPts val="0"/>
+              </a:spcAft>
+              <a:buClr>
+                <a:srgbClr val="000000"/>
+              </a:buClr>
+              <a:buSzPts val="1600"/>
+              <a:buFont typeface="Arial"/>
+              <a:buNone/>
+            </a:pPr>
+            <a:r>
+              <a:rPr lang="en-US" sz="3600" dirty="0">
+                <a:solidFill>
+                  <a:schemeClr val="lt1"/>
+                </a:solidFill>
+              </a:rPr>
+              <a:t>Dead at Age 53</a:t>
+            </a:r>
+            <a:endParaRPr sz="2000" b="0" i="0" u="none" strike="noStrike" cap="none" dirty="0">
+              <a:solidFill>
+                <a:srgbClr val="000000"/>
+              </a:solidFill>
+              <a:latin typeface="Arial"/>
+              <a:ea typeface="Arial"/>
+              <a:cs typeface="Arial"/>
+              <a:sym typeface="Arial"/>
+            </a:endParaRPr>
+          </a:p>
+        </p:txBody>
+      </p:sp>
+      <p:sp>
+        <p:nvSpPr>
           <p:cNvPr id="10" name="TextBox 9">
             <a:extLst>
               <a:ext uri="{FF2B5EF4-FFF2-40B4-BE49-F238E27FC236}">
@@ -22494,8 +22595,8 @@
         </p:nvSpPr>
         <p:spPr>
           <a:xfrm>
-            <a:off x="115671" y="1952951"/>
-            <a:ext cx="7609773" cy="3200876"/>
+            <a:off x="312431" y="2175372"/>
+            <a:ext cx="6987941" cy="3447098"/>
           </a:xfrm>
           <a:prstGeom prst="rect">
             <a:avLst/>
@@ -22520,8 +22621,7 @@
               <a:buChar char="•"/>
             </a:pPr>
             <a:r>
-              <a:rPr dirty="0"/>
-              <a:t>Young Ukrainian model who JUMPED from an apartment building in Kyiv — ruled suicide.</a:t>
+              <a:t>Drove her car at HIGH SPEED into a house in LA — massive FIREBALL engulfed the vehicle and the home.</a:t>
             </a:r>
           </a:p>
           <a:p>
@@ -22533,8 +22633,7 @@
               <a:buChar char="•"/>
             </a:pPr>
             <a:r>
-              <a:rPr dirty="0"/>
-              <a:t>Her friend Ruslana Korshunova died the EXACT same way ONE YEAR earlier — fell from the 9th floor in New York.</a:t>
+              <a:t>Had just starred in a child trafficking film. Viral posts said "she KNEW TOO MUCH."</a:t>
             </a:r>
           </a:p>
           <a:p>
@@ -22546,8 +22645,7 @@
               <a:buChar char="•"/>
             </a:pPr>
             <a:r>
-              <a:rPr dirty="0"/>
-              <a:t>Korshunova had flown on Epstein's PRIVATE JET to his island at age 18.</a:t>
+              <a:t>Was a childhood sexual abuse SURVIVOR who spoke publicly about her father raping her.</a:t>
             </a:r>
           </a:p>
           <a:p>
@@ -22559,8 +22657,7 @@
               <a:buChar char="•"/>
             </a:pPr>
             <a:r>
-              <a:rPr dirty="0"/>
-              <a:t>Both women attended "Rose of the World" cult sessions in Moscow — both had DRAMATIC personality changes after.</a:t>
+              <a:t>Died in the 2022 DEATH CLUSTER — same year as Brunel (hanged), Middleton (hanged + shot), and Hoffenberg (found dead).</a:t>
             </a:r>
           </a:p>
           <a:p>
@@ -22572,8 +22669,7 @@
               <a:buChar char="•"/>
             </a:pPr>
             <a:r>
-              <a:rPr dirty="0"/>
-              <a:t>Two young models. Same social circle. Same method of death. One year apart.</a:t>
+              <a:t>Cocaine and marijuana found in her system. Ruled accidental. She was 53 with three sons.</a:t>
             </a:r>
           </a:p>
         </p:txBody>
@@ -22668,30 +22764,6 @@
           </a:p>
         </p:txBody>
       </p:sp>
-      <p:pic>
-        <p:nvPicPr>
-          <p:cNvPr id="16" name="Picture 15" descr="Anastasia_Drozdova.jpg"/>
-          <p:cNvPicPr>
-            <a:picLocks noChangeAspect="1"/>
-          </p:cNvPicPr>
-          <p:nvPr/>
-        </p:nvPicPr>
-        <p:blipFill>
-          <a:blip r:embed="rId3"/>
-          <a:stretch>
-            <a:fillRect/>
-          </a:stretch>
-        </p:blipFill>
-        <p:spPr>
-          <a:xfrm>
-            <a:off x="8299962" y="1084146"/>
-            <a:ext cx="3571279" cy="3856982"/>
-          </a:xfrm>
-          <a:prstGeom prst="rect">
-            <a:avLst/>
-          </a:prstGeom>
-        </p:spPr>
-      </p:pic>
     </p:spTree>
   </p:cSld>
   <p:clrMapOvr>
@@ -29587,30 +29659,6 @@
           <a:chExt cx="0" cy="0"/>
         </a:xfrm>
       </p:grpSpPr>
-      <p:pic>
-        <p:nvPicPr>
-          <p:cNvPr id="16" name="Picture 15" descr="Anne_Heche.jpg"/>
-          <p:cNvPicPr>
-            <a:picLocks noChangeAspect="1"/>
-          </p:cNvPicPr>
-          <p:nvPr/>
-        </p:nvPicPr>
-        <p:blipFill>
-          <a:blip r:embed="rId3"/>
-          <a:stretch>
-            <a:fillRect/>
-          </a:stretch>
-        </p:blipFill>
-        <p:spPr>
-          <a:xfrm>
-            <a:off x="9291633" y="1084146"/>
-            <a:ext cx="2892736" cy="3856982"/>
-          </a:xfrm>
-          <a:prstGeom prst="rect">
-            <a:avLst/>
-          </a:prstGeom>
-        </p:spPr>
-      </p:pic>
       <p:sp>
         <p:nvSpPr>
           <p:cNvPr id="15" name="TextBox 14">
@@ -29649,7 +29697,7 @@
                   <a:schemeClr val="accent5"/>
                 </a:solidFill>
               </a:rPr>
-              <a:t>Why / How they Anne Heche:</a:t>
+              <a:t>Why / How they Gina Hutchinson:</a:t>
             </a:r>
           </a:p>
         </p:txBody>
@@ -29959,8 +30007,8 @@
         </p:nvSpPr>
         <p:spPr>
           <a:xfrm>
-            <a:off x="7506336" y="4925186"/>
-            <a:ext cx="4550222" cy="869505"/>
+            <a:off x="7503273" y="4888333"/>
+            <a:ext cx="4550222" cy="1530979"/>
           </a:xfrm>
           <a:prstGeom prst="rect">
             <a:avLst/>
@@ -30001,7 +30049,7 @@
                   <a:schemeClr val="lt1"/>
                 </a:solidFill>
               </a:rPr>
-              <a:t>Anne Heche</a:t>
+              <a:t>Gina Hutchinson</a:t>
             </a:r>
             <a:endParaRPr sz="3200" b="0" i="0" u="none" strike="noStrike" cap="none" dirty="0">
               <a:solidFill>
@@ -30029,7 +30077,7 @@
         </p:nvSpPr>
         <p:spPr>
           <a:xfrm>
-            <a:off x="7526107" y="5681420"/>
+            <a:off x="7590362" y="6412940"/>
             <a:ext cx="4550222" cy="548230"/>
           </a:xfrm>
           <a:prstGeom prst="rect">
@@ -30071,7 +30119,7 @@
                   <a:schemeClr val="lt1"/>
                 </a:solidFill>
               </a:rPr>
-              <a:t>Dead at Age 53</a:t>
+              <a:t>Dead at Age 33</a:t>
             </a:r>
             <a:endParaRPr sz="2000" b="0" i="0" u="none" strike="noStrike" cap="none" dirty="0">
               <a:solidFill>
@@ -30099,7 +30147,7 @@
         </p:nvSpPr>
         <p:spPr>
           <a:xfrm>
-            <a:off x="312431" y="2175372"/>
+            <a:off x="138505" y="1928237"/>
             <a:ext cx="6987941" cy="3447098"/>
           </a:xfrm>
           <a:prstGeom prst="rect">
@@ -30125,7 +30173,8 @@
               <a:buChar char="•"/>
             </a:pPr>
             <a:r>
-              <a:t>Drove her car at HIGH SPEED into a house in LA — massive FIREBALL engulfed the vehicle and the home.</a:t>
+              <a:rPr dirty="0"/>
+              <a:t>Age 33. Found dead of a SHOTGUN wound to the head at a Buddhist monastery. Ruled suicide.</a:t>
             </a:r>
           </a:p>
           <a:p>
@@ -30137,7 +30186,8 @@
               <a:buChar char="•"/>
             </a:pPr>
             <a:r>
-              <a:t>Had just starred in a child trafficking film. Viral posts said "she KNEW TOO MUCH."</a:t>
+              <a:rPr dirty="0"/>
+              <a:t>She was one of Keith Raniere's EARLIEST sexual abuse victims — first targeted when she was approximately 14 or 15 years old.</a:t>
             </a:r>
           </a:p>
           <a:p>
@@ -30149,7 +30199,8 @@
               <a:buChar char="•"/>
             </a:pPr>
             <a:r>
-              <a:t>Was a childhood sexual abuse SURVIVOR who spoke publicly about her father raping her.</a:t>
+              <a:rPr dirty="0"/>
+              <a:t>Raniere told her she must "leave her body" to achieve SPIRITUAL TRANSCENDENCE — language that could constitute encouraging suicide.</a:t>
             </a:r>
           </a:p>
           <a:p>
@@ -30161,7 +30212,8 @@
               <a:buChar char="•"/>
             </a:pPr>
             <a:r>
-              <a:t>Died in the 2022 DEATH CLUSTER — same year as Brunel (hanged), Middleton (hanged + shot), and Hoffenberg (found dead).</a:t>
+              <a:rPr dirty="0"/>
+              <a:t>Her hands were NOT PROPERLY TESTED for gunpowder residue. She was not known to OWN firearms.</a:t>
             </a:r>
           </a:p>
           <a:p>
@@ -30173,7 +30225,8 @@
               <a:buChar char="•"/>
             </a:pPr>
             <a:r>
-              <a:t>Cocaine and marijuana found in her system. Ruled accidental. She was 53 with three sons.</a:t>
+              <a:rPr dirty="0"/>
+              <a:t>Just FOUR MONTHS later, another woman connected to Raniere — Kristin Snyder — DISAPPEARED and was never found.</a:t>
             </a:r>
           </a:p>
         </p:txBody>
@@ -30268,7 +30321,36 @@
           </a:p>
         </p:txBody>
       </p:sp>
+      <p:pic>
+        <p:nvPicPr>
+          <p:cNvPr id="16" name="Picture 15" descr="Gina_Hutchinson.jpg"/>
+          <p:cNvPicPr>
+            <a:picLocks noChangeAspect="1"/>
+          </p:cNvPicPr>
+          <p:nvPr/>
+        </p:nvPicPr>
+        <p:blipFill>
+          <a:blip r:embed="rId3"/>
+          <a:stretch>
+            <a:fillRect/>
+          </a:stretch>
+        </p:blipFill>
+        <p:spPr>
+          <a:xfrm>
+            <a:off x="7503273" y="1291084"/>
+            <a:ext cx="5164658" cy="3443105"/>
+          </a:xfrm>
+          <a:prstGeom prst="rect">
+            <a:avLst/>
+          </a:prstGeom>
+        </p:spPr>
+      </p:pic>
     </p:spTree>
+    <p:extLst>
+      <p:ext uri="{BB962C8B-B14F-4D97-AF65-F5344CB8AC3E}">
+        <p14:creationId xmlns:p14="http://schemas.microsoft.com/office/powerpoint/2010/main" val="340902772"/>
+      </p:ext>
+    </p:extLst>
   </p:cSld>
   <p:clrMapOvr>
     <a:masterClrMapping/>
@@ -34879,6 +34961,30 @@
           <a:chExt cx="0" cy="0"/>
         </a:xfrm>
       </p:grpSpPr>
+      <p:pic>
+        <p:nvPicPr>
+          <p:cNvPr id="16" name="Picture 15" descr="Anthony_Bourdain.jpg"/>
+          <p:cNvPicPr>
+            <a:picLocks noChangeAspect="1"/>
+          </p:cNvPicPr>
+          <p:nvPr/>
+        </p:nvPicPr>
+        <p:blipFill>
+          <a:blip r:embed="rId3"/>
+          <a:stretch>
+            <a:fillRect/>
+          </a:stretch>
+        </p:blipFill>
+        <p:spPr>
+          <a:xfrm>
+            <a:off x="8701910" y="1084146"/>
+            <a:ext cx="2767384" cy="3856982"/>
+          </a:xfrm>
+          <a:prstGeom prst="rect">
+            <a:avLst/>
+          </a:prstGeom>
+        </p:spPr>
+      </p:pic>
       <p:sp>
         <p:nvSpPr>
           <p:cNvPr id="15" name="TextBox 14">
@@ -34917,7 +35023,7 @@
                   <a:schemeClr val="accent5"/>
                 </a:solidFill>
               </a:rPr>
-              <a:t>Why / How they Gina Hutchinson:</a:t>
+              <a:t>Why / How they Anthony Bourdain:</a:t>
             </a:r>
           </a:p>
         </p:txBody>
@@ -35227,8 +35333,8 @@
         </p:nvSpPr>
         <p:spPr>
           <a:xfrm>
-            <a:off x="7503273" y="4888333"/>
-            <a:ext cx="4550222" cy="1530979"/>
+            <a:off x="7506336" y="4925186"/>
+            <a:ext cx="4550222" cy="1421462"/>
           </a:xfrm>
           <a:prstGeom prst="rect">
             <a:avLst/>
@@ -35269,7 +35375,7 @@
                   <a:schemeClr val="lt1"/>
                 </a:solidFill>
               </a:rPr>
-              <a:t>Gina Hutchinson</a:t>
+              <a:t>Anthony Bourdain</a:t>
             </a:r>
             <a:endParaRPr sz="3200" b="0" i="0" u="none" strike="noStrike" cap="none" dirty="0">
               <a:solidFill>
@@ -35297,7 +35403,7 @@
         </p:nvSpPr>
         <p:spPr>
           <a:xfrm>
-            <a:off x="7590362" y="6412940"/>
+            <a:off x="7595304" y="6346648"/>
             <a:ext cx="4550222" cy="548230"/>
           </a:xfrm>
           <a:prstGeom prst="rect">
@@ -35339,7 +35445,7 @@
                   <a:schemeClr val="lt1"/>
                 </a:solidFill>
               </a:rPr>
-              <a:t>Dead at Age 33</a:t>
+              <a:t>Dead at Age 61</a:t>
             </a:r>
             <a:endParaRPr sz="2000" b="0" i="0" u="none" strike="noStrike" cap="none" dirty="0">
               <a:solidFill>
@@ -35367,7 +35473,7 @@
         </p:nvSpPr>
         <p:spPr>
           <a:xfrm>
-            <a:off x="138505" y="1928237"/>
+            <a:off x="312431" y="2175372"/>
             <a:ext cx="6987941" cy="3447098"/>
           </a:xfrm>
           <a:prstGeom prst="rect">
@@ -35393,8 +35499,7 @@
               <a:buChar char="•"/>
             </a:pPr>
             <a:r>
-              <a:rPr dirty="0"/>
-              <a:t>Age 33. Found dead of a SHOTGUN wound to the head at a Buddhist monastery. Ruled suicide.</a:t>
+              <a:t>Found HANGED in his French hotel room at age 61. No narcotics in his system. No signs of struggle.</a:t>
             </a:r>
           </a:p>
           <a:p>
@@ -35406,8 +35511,7 @@
               <a:buChar char="•"/>
             </a:pPr>
             <a:r>
-              <a:rPr dirty="0"/>
-              <a:t>She was one of Keith Raniere's EARLIEST sexual abuse victims — first targeted when she was approximately 14 or 15 years old.</a:t>
+              <a:t>One of the most VOCAL public advocates against powerful abusers — defended #MeToo accusers against Harvey Weinstein.</a:t>
             </a:r>
           </a:p>
           <a:p>
@@ -35419,8 +35523,7 @@
               <a:buChar char="•"/>
             </a:pPr>
             <a:r>
-              <a:rPr dirty="0"/>
-              <a:t>Raniere told her she must "leave her body" to achieve SPIRITUAL TRANSCENDENCE — language that could constitute encouraging suicide.</a:t>
+              <a:t>His best friend Eric Ripert said there were NO WARNING SIGNS. His mother said no indication of suicidal thoughts.</a:t>
             </a:r>
           </a:p>
           <a:p>
@@ -35432,8 +35535,7 @@
               <a:buChar char="•"/>
             </a:pPr>
             <a:r>
-              <a:rPr dirty="0"/>
-              <a:t>Her hands were NOT PROPERLY TESTED for gunpowder residue. She was not known to OWN firearms.</a:t>
+              <a:t>His death was the FIFTH in the 2017-2018 celebrity cluster: Cornell, Bennington, Avicii, Spade, then Bourdain — all within 13 months.</a:t>
             </a:r>
           </a:p>
           <a:p>
@@ -35445,8 +35547,7 @@
               <a:buChar char="•"/>
             </a:pPr>
             <a:r>
-              <a:rPr dirty="0"/>
-              <a:t>Just FOUR MONTHS later, another woman connected to Raniere — Kristin Snyder — DISAPPEARED and was never found.</a:t>
+              <a:t>His girlfriend Asia Argento was photographed with another man days before. The prosecution said it was "impulsive."</a:t>
             </a:r>
           </a:p>
         </p:txBody>
@@ -35541,36 +35642,7 @@
           </a:p>
         </p:txBody>
       </p:sp>
-      <p:pic>
-        <p:nvPicPr>
-          <p:cNvPr id="16" name="Picture 15" descr="Gina_Hutchinson.jpg"/>
-          <p:cNvPicPr>
-            <a:picLocks noChangeAspect="1"/>
-          </p:cNvPicPr>
-          <p:nvPr/>
-        </p:nvPicPr>
-        <p:blipFill>
-          <a:blip r:embed="rId3"/>
-          <a:stretch>
-            <a:fillRect/>
-          </a:stretch>
-        </p:blipFill>
-        <p:spPr>
-          <a:xfrm>
-            <a:off x="7503273" y="1291084"/>
-            <a:ext cx="5164658" cy="3443105"/>
-          </a:xfrm>
-          <a:prstGeom prst="rect">
-            <a:avLst/>
-          </a:prstGeom>
-        </p:spPr>
-      </p:pic>
     </p:spTree>
-    <p:extLst>
-      <p:ext uri="{BB962C8B-B14F-4D97-AF65-F5344CB8AC3E}">
-        <p14:creationId xmlns:p14="http://schemas.microsoft.com/office/powerpoint/2010/main" val="340902772"/>
-      </p:ext>
-    </p:extLst>
   </p:cSld>
   <p:clrMapOvr>
     <a:masterClrMapping/>
@@ -35595,30 +35667,6 @@
           <a:chExt cx="0" cy="0"/>
         </a:xfrm>
       </p:grpSpPr>
-      <p:pic>
-        <p:nvPicPr>
-          <p:cNvPr id="16" name="Picture 15" descr="Anthony_Bourdain.jpg"/>
-          <p:cNvPicPr>
-            <a:picLocks noChangeAspect="1"/>
-          </p:cNvPicPr>
-          <p:nvPr/>
-        </p:nvPicPr>
-        <p:blipFill>
-          <a:blip r:embed="rId3"/>
-          <a:stretch>
-            <a:fillRect/>
-          </a:stretch>
-        </p:blipFill>
-        <p:spPr>
-          <a:xfrm>
-            <a:off x="8701910" y="1084146"/>
-            <a:ext cx="2767384" cy="3856982"/>
-          </a:xfrm>
-          <a:prstGeom prst="rect">
-            <a:avLst/>
-          </a:prstGeom>
-        </p:spPr>
-      </p:pic>
       <p:sp>
         <p:nvSpPr>
           <p:cNvPr id="15" name="TextBox 14">
@@ -35657,7 +35705,7 @@
                   <a:schemeClr val="accent5"/>
                 </a:solidFill>
               </a:rPr>
-              <a:t>Why / How they Anthony Bourdain:</a:t>
+              <a:t>Why / How they Anastasia Drozdova:</a:t>
             </a:r>
           </a:p>
         </p:txBody>
@@ -35968,7 +36016,7 @@
         <p:spPr>
           <a:xfrm>
             <a:off x="7506336" y="4925186"/>
-            <a:ext cx="4550222" cy="1421462"/>
+            <a:ext cx="4550222" cy="1564583"/>
           </a:xfrm>
           <a:prstGeom prst="rect">
             <a:avLst/>
@@ -36009,7 +36057,7 @@
                   <a:schemeClr val="lt1"/>
                 </a:solidFill>
               </a:rPr>
-              <a:t>Anthony Bourdain</a:t>
+              <a:t>Anastasia Drozdova</a:t>
             </a:r>
             <a:endParaRPr sz="3200" b="0" i="0" u="none" strike="noStrike" cap="none" dirty="0">
               <a:solidFill>
@@ -36025,90 +36073,20 @@
       </p:sp>
       <p:sp>
         <p:nvSpPr>
-          <p:cNvPr id="8" name="Google Shape;170;p31">
-            <a:extLst>
-              <a:ext uri="{FF2B5EF4-FFF2-40B4-BE49-F238E27FC236}">
-                <a16:creationId xmlns:a16="http://schemas.microsoft.com/office/drawing/2014/main" id="{B069CCDF-FA80-D75C-7412-189D5C3D3A16}"/>
-              </a:ext>
-            </a:extLst>
-          </p:cNvPr>
-          <p:cNvSpPr/>
+          <p:cNvPr id="10" name="TextBox 9">
+            <a:extLst>
+              <a:ext uri="{FF2B5EF4-FFF2-40B4-BE49-F238E27FC236}">
+                <a16:creationId xmlns:a16="http://schemas.microsoft.com/office/drawing/2014/main" id="{ABFEA484-AE6A-906E-D59E-C3F7E9DDD90C}"/>
+              </a:ext>
+            </a:extLst>
+          </p:cNvPr>
+          <p:cNvSpPr txBox="1"/>
           <p:nvPr/>
         </p:nvSpPr>
         <p:spPr>
           <a:xfrm>
-            <a:off x="7595304" y="6346648"/>
-            <a:ext cx="4550222" cy="548230"/>
-          </a:xfrm>
-          <a:prstGeom prst="rect">
-            <a:avLst/>
-          </a:prstGeom>
-          <a:solidFill>
-            <a:srgbClr val="C00000"/>
-          </a:solidFill>
-          <a:ln>
-            <a:noFill/>
-          </a:ln>
-        </p:spPr>
-        <p:txBody>
-          <a:bodyPr spcFirstLastPara="1" wrap="square" lIns="91425" tIns="45700" rIns="91425" bIns="45700" anchor="ctr" anchorCtr="0">
-            <a:noAutofit/>
-          </a:bodyPr>
-          <a:lstStyle/>
-          <a:p>
-            <a:pPr marL="0" marR="0" lvl="0" indent="0" algn="ctr" rtl="0">
-              <a:lnSpc>
-                <a:spcPct val="100000"/>
-              </a:lnSpc>
-              <a:spcBef>
-                <a:spcPts val="0"/>
-              </a:spcBef>
-              <a:spcAft>
-                <a:spcPts val="0"/>
-              </a:spcAft>
-              <a:buClr>
-                <a:srgbClr val="000000"/>
-              </a:buClr>
-              <a:buSzPts val="1600"/>
-              <a:buFont typeface="Arial"/>
-              <a:buNone/>
-            </a:pPr>
-            <a:r>
-              <a:rPr lang="en-US" sz="3600" dirty="0">
-                <a:solidFill>
-                  <a:schemeClr val="lt1"/>
-                </a:solidFill>
-              </a:rPr>
-              <a:t>Dead at Age 61</a:t>
-            </a:r>
-            <a:endParaRPr sz="2000" b="0" i="0" u="none" strike="noStrike" cap="none" dirty="0">
-              <a:solidFill>
-                <a:srgbClr val="000000"/>
-              </a:solidFill>
-              <a:latin typeface="Arial"/>
-              <a:ea typeface="Arial"/>
-              <a:cs typeface="Arial"/>
-              <a:sym typeface="Arial"/>
-            </a:endParaRPr>
-          </a:p>
-        </p:txBody>
-      </p:sp>
-      <p:sp>
-        <p:nvSpPr>
-          <p:cNvPr id="10" name="TextBox 9">
-            <a:extLst>
-              <a:ext uri="{FF2B5EF4-FFF2-40B4-BE49-F238E27FC236}">
-                <a16:creationId xmlns:a16="http://schemas.microsoft.com/office/drawing/2014/main" id="{ABFEA484-AE6A-906E-D59E-C3F7E9DDD90C}"/>
-              </a:ext>
-            </a:extLst>
-          </p:cNvPr>
-          <p:cNvSpPr txBox="1"/>
-          <p:nvPr/>
-        </p:nvSpPr>
-        <p:spPr>
-          <a:xfrm>
-            <a:off x="312431" y="2175372"/>
-            <a:ext cx="6987941" cy="3447098"/>
+            <a:off x="115671" y="1952951"/>
+            <a:ext cx="7609773" cy="3200876"/>
           </a:xfrm>
           <a:prstGeom prst="rect">
             <a:avLst/>
@@ -36133,7 +36111,8 @@
               <a:buChar char="•"/>
             </a:pPr>
             <a:r>
-              <a:t>Found HANGED in his French hotel room at age 61. No narcotics in his system. No signs of struggle.</a:t>
+              <a:rPr dirty="0"/>
+              <a:t>Young Ukrainian model who JUMPED from an apartment building in Kyiv — ruled suicide.</a:t>
             </a:r>
           </a:p>
           <a:p>
@@ -36145,7 +36124,8 @@
               <a:buChar char="•"/>
             </a:pPr>
             <a:r>
-              <a:t>One of the most VOCAL public advocates against powerful abusers — defended #MeToo accusers against Harvey Weinstein.</a:t>
+              <a:rPr dirty="0"/>
+              <a:t>Her friend Ruslana Korshunova died the EXACT same way ONE YEAR earlier — fell from the 9th floor in New York.</a:t>
             </a:r>
           </a:p>
           <a:p>
@@ -36157,7 +36137,8 @@
               <a:buChar char="•"/>
             </a:pPr>
             <a:r>
-              <a:t>His best friend Eric Ripert said there were NO WARNING SIGNS. His mother said no indication of suicidal thoughts.</a:t>
+              <a:rPr dirty="0"/>
+              <a:t>Korshunova had flown on Epstein's PRIVATE JET to his island at age 18.</a:t>
             </a:r>
           </a:p>
           <a:p>
@@ -36169,7 +36150,8 @@
               <a:buChar char="•"/>
             </a:pPr>
             <a:r>
-              <a:t>His death was the FIFTH in the 2017-2018 celebrity cluster: Cornell, Bennington, Avicii, Spade, then Bourdain — all within 13 months.</a:t>
+              <a:rPr dirty="0"/>
+              <a:t>Both women attended "Rose of the World" cult sessions in Moscow — both had DRAMATIC personality changes after.</a:t>
             </a:r>
           </a:p>
           <a:p>
@@ -36181,7 +36163,8 @@
               <a:buChar char="•"/>
             </a:pPr>
             <a:r>
-              <a:t>His girlfriend Asia Argento was photographed with another man days before. The prosecution said it was "impulsive."</a:t>
+              <a:rPr dirty="0"/>
+              <a:t>Two young models. Same social circle. Same method of death. One year apart.</a:t>
             </a:r>
           </a:p>
         </p:txBody>
@@ -36276,6 +36259,30 @@
           </a:p>
         </p:txBody>
       </p:sp>
+      <p:pic>
+        <p:nvPicPr>
+          <p:cNvPr id="16" name="Picture 15" descr="Anastasia_Drozdova.jpg"/>
+          <p:cNvPicPr>
+            <a:picLocks noChangeAspect="1"/>
+          </p:cNvPicPr>
+          <p:nvPr/>
+        </p:nvPicPr>
+        <p:blipFill>
+          <a:blip r:embed="rId3"/>
+          <a:stretch>
+            <a:fillRect/>
+          </a:stretch>
+        </p:blipFill>
+        <p:spPr>
+          <a:xfrm>
+            <a:off x="8299962" y="1084146"/>
+            <a:ext cx="3571279" cy="3856982"/>
+          </a:xfrm>
+          <a:prstGeom prst="rect">
+            <a:avLst/>
+          </a:prstGeom>
+        </p:spPr>
+      </p:pic>
     </p:spTree>
   </p:cSld>
   <p:clrMapOvr>
